--- a/CCMS-Presentation.pptx
+++ b/CCMS-Presentation.pptx
@@ -23,6 +23,7 @@
     <p:sldId id="272" r:id="rId23"/>
     <p:sldId id="273" r:id="rId24"/>
     <p:sldId id="274" r:id="rId25"/>
+    <p:sldId id="275" r:id="rId26"/>
     <p:sldId id="271" r:id="rId22"/>
   </p:sldIdLst>
   <p:sldSz cx="12191695" cy="6858000" type="screen4x3"/>
@@ -22898,6 +22899,1472 @@
                 <a:latin typeface="Segoe UI"/>
               </a:rPr>
               <a:t>How every stakeholder stays informed</a:t>
+            </a:r>
+          </a:p>
+        </p:txBody>
+      </p:sp>
+      <p:sp>
+        <p:nvSpPr>
+          <p:cNvPr id="49" name="Rounded Rectangle 48"/>
+          <p:cNvSpPr/>
+          <p:nvPr/>
+        </p:nvSpPr>
+        <p:spPr>
+          <a:xfrm>
+            <a:off x="3337560" y="4590288"/>
+            <a:ext cx="5486400" cy="658368"/>
+          </a:xfrm>
+          <a:prstGeom prst="roundRect">
+            <a:avLst>
+              <a:gd name="adj" fmla="val 10000"/>
+            </a:avLst>
+          </a:prstGeom>
+          <a:solidFill>
+            <a:srgbClr val="FFFFFF"/>
+          </a:solidFill>
+          <a:ln w="12700">
+            <a:solidFill>
+              <a:srgbClr val="D5DDE3"/>
+            </a:solidFill>
+          </a:ln>
+          <a:effectLst/>
+        </p:spPr>
+        <p:style>
+          <a:lnRef idx="1">
+            <a:schemeClr val="accent1"/>
+          </a:lnRef>
+          <a:fillRef idx="3">
+            <a:schemeClr val="accent1"/>
+          </a:fillRef>
+          <a:effectRef idx="2">
+            <a:schemeClr val="accent1"/>
+          </a:effectRef>
+          <a:fontRef idx="minor">
+            <a:schemeClr val="lt1"/>
+          </a:fontRef>
+        </p:style>
+        <p:txBody>
+          <a:bodyPr rtlCol="0" anchor="ctr"/>
+          <a:lstStyle/>
+          <a:p>
+            <a:pPr algn="ctr"/>
+          </a:p>
+        </p:txBody>
+      </p:sp>
+      <p:sp>
+        <p:nvSpPr>
+          <p:cNvPr id="50" name="Rounded Rectangle 49"/>
+          <p:cNvSpPr/>
+          <p:nvPr/>
+        </p:nvSpPr>
+        <p:spPr>
+          <a:xfrm>
+            <a:off x="3337560" y="4590288"/>
+            <a:ext cx="822960" cy="658368"/>
+          </a:xfrm>
+          <a:prstGeom prst="roundRect">
+            <a:avLst>
+              <a:gd name="adj" fmla="val 10000"/>
+            </a:avLst>
+          </a:prstGeom>
+          <a:solidFill>
+            <a:srgbClr val="112A40"/>
+          </a:solidFill>
+          <a:ln>
+            <a:noFill/>
+          </a:ln>
+          <a:effectLst/>
+        </p:spPr>
+        <p:style>
+          <a:lnRef idx="1">
+            <a:schemeClr val="accent1"/>
+          </a:lnRef>
+          <a:fillRef idx="3">
+            <a:schemeClr val="accent1"/>
+          </a:fillRef>
+          <a:effectRef idx="2">
+            <a:schemeClr val="accent1"/>
+          </a:effectRef>
+          <a:fontRef idx="minor">
+            <a:schemeClr val="lt1"/>
+          </a:fontRef>
+        </p:style>
+        <p:txBody>
+          <a:bodyPr rtlCol="0" anchor="ctr"/>
+          <a:lstStyle/>
+          <a:p>
+            <a:pPr algn="ctr"/>
+          </a:p>
+        </p:txBody>
+      </p:sp>
+      <p:sp>
+        <p:nvSpPr>
+          <p:cNvPr id="51" name="Rectangle 50"/>
+          <p:cNvSpPr/>
+          <p:nvPr/>
+        </p:nvSpPr>
+        <p:spPr>
+          <a:xfrm>
+            <a:off x="3749039" y="4590288"/>
+            <a:ext cx="411480" cy="658368"/>
+          </a:xfrm>
+          <a:prstGeom prst="rect">
+            <a:avLst/>
+          </a:prstGeom>
+          <a:solidFill>
+            <a:srgbClr val="112A40"/>
+          </a:solidFill>
+          <a:ln>
+            <a:noFill/>
+          </a:ln>
+          <a:effectLst/>
+        </p:spPr>
+        <p:style>
+          <a:lnRef idx="1">
+            <a:schemeClr val="accent1"/>
+          </a:lnRef>
+          <a:fillRef idx="3">
+            <a:schemeClr val="accent1"/>
+          </a:fillRef>
+          <a:effectRef idx="2">
+            <a:schemeClr val="accent1"/>
+          </a:effectRef>
+          <a:fontRef idx="minor">
+            <a:schemeClr val="lt1"/>
+          </a:fontRef>
+        </p:style>
+        <p:txBody>
+          <a:bodyPr rtlCol="0" anchor="ctr"/>
+          <a:lstStyle/>
+          <a:p>
+            <a:pPr algn="ctr"/>
+          </a:p>
+        </p:txBody>
+      </p:sp>
+      <p:sp>
+        <p:nvSpPr>
+          <p:cNvPr id="52" name="TextBox 51"/>
+          <p:cNvSpPr txBox="1"/>
+          <p:nvPr/>
+        </p:nvSpPr>
+        <p:spPr>
+          <a:xfrm>
+            <a:off x="3337560" y="4590288"/>
+            <a:ext cx="822960" cy="658368"/>
+          </a:xfrm>
+          <a:prstGeom prst="rect">
+            <a:avLst/>
+          </a:prstGeom>
+          <a:noFill/>
+        </p:spPr>
+        <p:txBody>
+          <a:bodyPr wrap="square" lIns="0" rIns="0" tIns="0" bIns="0" anchor="ctr">
+            <a:spAutoFit/>
+          </a:bodyPr>
+          <a:lstStyle/>
+          <a:p>
+            <a:pPr algn="ctr"/>
+            <a:r>
+              <a:rPr sz="1900" b="1">
+                <a:solidFill>
+                  <a:srgbClr val="E0912F"/>
+                </a:solidFill>
+                <a:latin typeface="Segoe UI Semibold"/>
+              </a:rPr>
+              <a:t>09</a:t>
+            </a:r>
+          </a:p>
+        </p:txBody>
+      </p:sp>
+      <p:sp>
+        <p:nvSpPr>
+          <p:cNvPr id="53" name="TextBox 52"/>
+          <p:cNvSpPr txBox="1"/>
+          <p:nvPr/>
+        </p:nvSpPr>
+        <p:spPr>
+          <a:xfrm>
+            <a:off x="4297680" y="4672583"/>
+            <a:ext cx="4389120" cy="512064"/>
+          </a:xfrm>
+          <a:prstGeom prst="rect">
+            <a:avLst/>
+          </a:prstGeom>
+          <a:noFill/>
+        </p:spPr>
+        <p:txBody>
+          <a:bodyPr wrap="square" lIns="0" rIns="0" tIns="0" bIns="0" anchor="t">
+            <a:spAutoFit/>
+          </a:bodyPr>
+          <a:lstStyle/>
+          <a:p>
+            <a:pPr algn="l"/>
+            <a:r>
+              <a:rPr sz="1400" b="1">
+                <a:solidFill>
+                  <a:srgbClr val="112A40"/>
+                </a:solidFill>
+                <a:latin typeface="Segoe UI Semibold"/>
+              </a:rPr>
+              <a:t>Deployment</a:t>
+            </a:r>
+          </a:p>
+          <a:p>
+            <a:pPr algn="l"/>
+            <a:r>
+              <a:rPr sz="1050" b="0">
+                <a:solidFill>
+                  <a:srgbClr val="5A6B78"/>
+                </a:solidFill>
+                <a:latin typeface="Segoe UI"/>
+              </a:rPr>
+              <a:t>Live, single-service, on managed Postgres</a:t>
+            </a:r>
+          </a:p>
+        </p:txBody>
+      </p:sp>
+    </p:spTree>
+  </p:cSld>
+  <p:clrMapOvr>
+    <a:masterClrMapping/>
+  </p:clrMapOvr>
+</p:sld>
+</file>
+
+<file path=ppt/slides/slide20.xml><?xml version="1.0" encoding="utf-8"?>
+<p:sld xmlns:a="http://schemas.openxmlformats.org/drawingml/2006/main" xmlns:p="http://schemas.openxmlformats.org/presentationml/2006/main" xmlns:r="http://schemas.openxmlformats.org/officeDocument/2006/relationships">
+  <p:cSld>
+    <p:spTree>
+      <p:nvGrpSpPr>
+        <p:cNvPr id="1" name=""/>
+        <p:cNvGrpSpPr/>
+        <p:nvPr/>
+      </p:nvGrpSpPr>
+      <p:grpSpPr/>
+      <p:sp>
+        <p:nvSpPr>
+          <p:cNvPr id="2" name="Rectangle 1"/>
+          <p:cNvSpPr/>
+          <p:nvPr/>
+        </p:nvSpPr>
+        <p:spPr>
+          <a:xfrm>
+            <a:off x="0" y="0"/>
+            <a:ext cx="12191695" cy="1170432"/>
+          </a:xfrm>
+          <a:prstGeom prst="rect">
+            <a:avLst/>
+          </a:prstGeom>
+          <a:solidFill>
+            <a:srgbClr val="112A40"/>
+          </a:solidFill>
+          <a:ln>
+            <a:noFill/>
+          </a:ln>
+          <a:effectLst/>
+        </p:spPr>
+        <p:style>
+          <a:lnRef idx="1">
+            <a:schemeClr val="accent1"/>
+          </a:lnRef>
+          <a:fillRef idx="3">
+            <a:schemeClr val="accent1"/>
+          </a:fillRef>
+          <a:effectRef idx="2">
+            <a:schemeClr val="accent1"/>
+          </a:effectRef>
+          <a:fontRef idx="minor">
+            <a:schemeClr val="lt1"/>
+          </a:fontRef>
+        </p:style>
+        <p:txBody>
+          <a:bodyPr rtlCol="0" anchor="ctr"/>
+          <a:lstStyle/>
+          <a:p>
+            <a:pPr algn="ctr"/>
+          </a:p>
+        </p:txBody>
+      </p:sp>
+      <p:sp>
+        <p:nvSpPr>
+          <p:cNvPr id="3" name="Rectangle 2"/>
+          <p:cNvSpPr/>
+          <p:nvPr/>
+        </p:nvSpPr>
+        <p:spPr>
+          <a:xfrm>
+            <a:off x="0" y="1170432"/>
+            <a:ext cx="12191695" cy="54864"/>
+          </a:xfrm>
+          <a:prstGeom prst="rect">
+            <a:avLst/>
+          </a:prstGeom>
+          <a:solidFill>
+            <a:srgbClr val="E0912F"/>
+          </a:solidFill>
+          <a:ln>
+            <a:noFill/>
+          </a:ln>
+          <a:effectLst/>
+        </p:spPr>
+        <p:style>
+          <a:lnRef idx="1">
+            <a:schemeClr val="accent1"/>
+          </a:lnRef>
+          <a:fillRef idx="3">
+            <a:schemeClr val="accent1"/>
+          </a:fillRef>
+          <a:effectRef idx="2">
+            <a:schemeClr val="accent1"/>
+          </a:effectRef>
+          <a:fontRef idx="minor">
+            <a:schemeClr val="lt1"/>
+          </a:fontRef>
+        </p:style>
+        <p:txBody>
+          <a:bodyPr rtlCol="0" anchor="ctr"/>
+          <a:lstStyle/>
+          <a:p>
+            <a:pPr algn="ctr"/>
+          </a:p>
+        </p:txBody>
+      </p:sp>
+      <p:sp>
+        <p:nvSpPr>
+          <p:cNvPr id="4" name="TextBox 3"/>
+          <p:cNvSpPr txBox="1"/>
+          <p:nvPr/>
+        </p:nvSpPr>
+        <p:spPr>
+          <a:xfrm>
+            <a:off x="502920" y="219456"/>
+            <a:ext cx="10058400" cy="274320"/>
+          </a:xfrm>
+          <a:prstGeom prst="rect">
+            <a:avLst/>
+          </a:prstGeom>
+          <a:noFill/>
+        </p:spPr>
+        <p:txBody>
+          <a:bodyPr wrap="square" lIns="0" rIns="0" tIns="0" bIns="0" anchor="t">
+            <a:spAutoFit/>
+          </a:bodyPr>
+          <a:lstStyle/>
+          <a:p>
+            <a:pPr algn="l"/>
+            <a:r>
+              <a:rPr sz="1100" b="1">
+                <a:solidFill>
+                  <a:srgbClr val="E0912F"/>
+                </a:solidFill>
+                <a:latin typeface="Segoe UI"/>
+              </a:rPr>
+              <a:t>09 · DEPLOYMENT</a:t>
+            </a:r>
+          </a:p>
+        </p:txBody>
+      </p:sp>
+      <p:sp>
+        <p:nvSpPr>
+          <p:cNvPr id="5" name="TextBox 4"/>
+          <p:cNvSpPr txBox="1"/>
+          <p:nvPr/>
+        </p:nvSpPr>
+        <p:spPr>
+          <a:xfrm>
+            <a:off x="502920" y="457200"/>
+            <a:ext cx="11155680" cy="640080"/>
+          </a:xfrm>
+          <a:prstGeom prst="rect">
+            <a:avLst/>
+          </a:prstGeom>
+          <a:noFill/>
+        </p:spPr>
+        <p:txBody>
+          <a:bodyPr wrap="square" lIns="0" rIns="0" tIns="0" bIns="0" anchor="t">
+            <a:spAutoFit/>
+          </a:bodyPr>
+          <a:lstStyle/>
+          <a:p>
+            <a:pPr algn="l"/>
+            <a:r>
+              <a:rPr sz="2600" b="1">
+                <a:solidFill>
+                  <a:srgbClr val="FFFFFF"/>
+                </a:solidFill>
+                <a:latin typeface="Segoe UI Semibold"/>
+              </a:rPr>
+              <a:t>Deployed live on the internet</a:t>
+            </a:r>
+          </a:p>
+        </p:txBody>
+      </p:sp>
+      <p:sp>
+        <p:nvSpPr>
+          <p:cNvPr id="6" name="Rectangle 5"/>
+          <p:cNvSpPr/>
+          <p:nvPr/>
+        </p:nvSpPr>
+        <p:spPr>
+          <a:xfrm>
+            <a:off x="0" y="6510528"/>
+            <a:ext cx="12191695" cy="347472"/>
+          </a:xfrm>
+          <a:prstGeom prst="rect">
+            <a:avLst/>
+          </a:prstGeom>
+          <a:solidFill>
+            <a:srgbClr val="112A40"/>
+          </a:solidFill>
+          <a:ln>
+            <a:noFill/>
+          </a:ln>
+          <a:effectLst/>
+        </p:spPr>
+        <p:style>
+          <a:lnRef idx="1">
+            <a:schemeClr val="accent1"/>
+          </a:lnRef>
+          <a:fillRef idx="3">
+            <a:schemeClr val="accent1"/>
+          </a:fillRef>
+          <a:effectRef idx="2">
+            <a:schemeClr val="accent1"/>
+          </a:effectRef>
+          <a:fontRef idx="minor">
+            <a:schemeClr val="lt1"/>
+          </a:fontRef>
+        </p:style>
+        <p:txBody>
+          <a:bodyPr rtlCol="0" anchor="ctr"/>
+          <a:lstStyle/>
+          <a:p>
+            <a:pPr algn="ctr"/>
+          </a:p>
+        </p:txBody>
+      </p:sp>
+      <p:sp>
+        <p:nvSpPr>
+          <p:cNvPr id="7" name="TextBox 6"/>
+          <p:cNvSpPr txBox="1"/>
+          <p:nvPr/>
+        </p:nvSpPr>
+        <p:spPr>
+          <a:xfrm>
+            <a:off x="502920" y="6528816"/>
+            <a:ext cx="7315200" cy="310896"/>
+          </a:xfrm>
+          <a:prstGeom prst="rect">
+            <a:avLst/>
+          </a:prstGeom>
+          <a:noFill/>
+        </p:spPr>
+        <p:txBody>
+          <a:bodyPr wrap="square" lIns="0" rIns="0" tIns="0" bIns="0" anchor="t">
+            <a:spAutoFit/>
+          </a:bodyPr>
+          <a:lstStyle/>
+          <a:p>
+            <a:pPr algn="l"/>
+            <a:r>
+              <a:rPr sz="900" b="0">
+                <a:solidFill>
+                  <a:srgbClr val="B9C7D2"/>
+                </a:solidFill>
+                <a:latin typeface="Segoe UI"/>
+              </a:rPr>
+              <a:t>Customer Complaint Management System  ·  Orient Paper &amp; Mill</a:t>
+            </a:r>
+          </a:p>
+        </p:txBody>
+      </p:sp>
+      <p:sp>
+        <p:nvSpPr>
+          <p:cNvPr id="8" name="TextBox 7"/>
+          <p:cNvSpPr txBox="1"/>
+          <p:nvPr/>
+        </p:nvSpPr>
+        <p:spPr>
+          <a:xfrm>
+            <a:off x="10424160" y="6528816"/>
+            <a:ext cx="1280160" cy="310896"/>
+          </a:xfrm>
+          <a:prstGeom prst="rect">
+            <a:avLst/>
+          </a:prstGeom>
+          <a:noFill/>
+        </p:spPr>
+        <p:txBody>
+          <a:bodyPr wrap="square" lIns="0" rIns="0" tIns="0" bIns="0" anchor="t">
+            <a:spAutoFit/>
+          </a:bodyPr>
+          <a:lstStyle/>
+          <a:p>
+            <a:pPr algn="r"/>
+            <a:r>
+              <a:rPr sz="900" b="1">
+                <a:solidFill>
+                  <a:srgbClr val="E0912F"/>
+                </a:solidFill>
+                <a:latin typeface="Segoe UI"/>
+              </a:rPr>
+              <a:t>18</a:t>
+            </a:r>
+          </a:p>
+        </p:txBody>
+      </p:sp>
+      <p:sp>
+        <p:nvSpPr>
+          <p:cNvPr id="9" name="Rounded Rectangle 8"/>
+          <p:cNvSpPr/>
+          <p:nvPr/>
+        </p:nvSpPr>
+        <p:spPr>
+          <a:xfrm>
+            <a:off x="502920" y="1463040"/>
+            <a:ext cx="11183112" cy="841248"/>
+          </a:xfrm>
+          <a:prstGeom prst="roundRect">
+            <a:avLst>
+              <a:gd name="adj" fmla="val 10000"/>
+            </a:avLst>
+          </a:prstGeom>
+          <a:solidFill>
+            <a:srgbClr val="EEF2F5"/>
+          </a:solidFill>
+          <a:ln>
+            <a:noFill/>
+          </a:ln>
+          <a:effectLst/>
+        </p:spPr>
+        <p:style>
+          <a:lnRef idx="1">
+            <a:schemeClr val="accent1"/>
+          </a:lnRef>
+          <a:fillRef idx="3">
+            <a:schemeClr val="accent1"/>
+          </a:fillRef>
+          <a:effectRef idx="2">
+            <a:schemeClr val="accent1"/>
+          </a:effectRef>
+          <a:fontRef idx="minor">
+            <a:schemeClr val="lt1"/>
+          </a:fontRef>
+        </p:style>
+        <p:txBody>
+          <a:bodyPr rtlCol="0" anchor="ctr"/>
+          <a:lstStyle/>
+          <a:p>
+            <a:pPr algn="ctr"/>
+          </a:p>
+        </p:txBody>
+      </p:sp>
+      <p:sp>
+        <p:nvSpPr>
+          <p:cNvPr id="10" name="Rounded Rectangle 9"/>
+          <p:cNvSpPr/>
+          <p:nvPr/>
+        </p:nvSpPr>
+        <p:spPr>
+          <a:xfrm>
+            <a:off x="713232" y="1609344"/>
+            <a:ext cx="118872" cy="548640"/>
+          </a:xfrm>
+          <a:prstGeom prst="roundRect">
+            <a:avLst>
+              <a:gd name="adj" fmla="val 50000"/>
+            </a:avLst>
+          </a:prstGeom>
+          <a:solidFill>
+            <a:srgbClr val="E0912F"/>
+          </a:solidFill>
+          <a:ln>
+            <a:noFill/>
+          </a:ln>
+          <a:effectLst/>
+        </p:spPr>
+        <p:style>
+          <a:lnRef idx="1">
+            <a:schemeClr val="accent1"/>
+          </a:lnRef>
+          <a:fillRef idx="3">
+            <a:schemeClr val="accent1"/>
+          </a:fillRef>
+          <a:effectRef idx="2">
+            <a:schemeClr val="accent1"/>
+          </a:effectRef>
+          <a:fontRef idx="minor">
+            <a:schemeClr val="lt1"/>
+          </a:fontRef>
+        </p:style>
+        <p:txBody>
+          <a:bodyPr rtlCol="0" anchor="ctr"/>
+          <a:lstStyle/>
+          <a:p>
+            <a:pPr algn="ctr"/>
+          </a:p>
+        </p:txBody>
+      </p:sp>
+      <p:sp>
+        <p:nvSpPr>
+          <p:cNvPr id="11" name="TextBox 10"/>
+          <p:cNvSpPr txBox="1"/>
+          <p:nvPr/>
+        </p:nvSpPr>
+        <p:spPr>
+          <a:xfrm>
+            <a:off x="969264" y="1463040"/>
+            <a:ext cx="10424160" cy="841248"/>
+          </a:xfrm>
+          <a:prstGeom prst="rect">
+            <a:avLst/>
+          </a:prstGeom>
+          <a:noFill/>
+        </p:spPr>
+        <p:txBody>
+          <a:bodyPr wrap="square" lIns="0" rIns="0" tIns="0" bIns="0" anchor="ctr">
+            <a:spAutoFit/>
+          </a:bodyPr>
+          <a:lstStyle/>
+          <a:p>
+            <a:pPr algn="l"/>
+            <a:r>
+              <a:rPr sz="1300" b="0">
+                <a:solidFill>
+                  <a:srgbClr val="1A2530"/>
+                </a:solidFill>
+                <a:latin typeface="Segoe UI"/>
+              </a:rPr>
+              <a:t>Live at  </a:t>
+            </a:r>
+            <a:r>
+              <a:rPr sz="1400" b="1">
+                <a:solidFill>
+                  <a:srgbClr val="112A40"/>
+                </a:solidFill>
+                <a:latin typeface="Segoe UI Semibold"/>
+              </a:rPr>
+              <a:t>https://ccms-6dut.onrender.com</a:t>
+            </a:r>
+          </a:p>
+          <a:p>
+            <a:pPr algn="l">
+              <a:spcAft>
+                <a:spcPts val="0"/>
+              </a:spcAft>
+            </a:pPr>
+            <a:r>
+              <a:rPr sz="1100" b="0">
+                <a:solidFill>
+                  <a:srgbClr val="5A6B78"/>
+                </a:solidFill>
+                <a:latin typeface="Segoe UI"/>
+              </a:rPr>
+              <a:t>Deployed as a single web service on managed PostgreSQL, with production security enabled.</a:t>
+            </a:r>
+          </a:p>
+        </p:txBody>
+      </p:sp>
+      <p:sp>
+        <p:nvSpPr>
+          <p:cNvPr id="12" name="Rounded Rectangle 11"/>
+          <p:cNvSpPr/>
+          <p:nvPr/>
+        </p:nvSpPr>
+        <p:spPr>
+          <a:xfrm>
+            <a:off x="502920" y="2514600"/>
+            <a:ext cx="5440680" cy="1700784"/>
+          </a:xfrm>
+          <a:prstGeom prst="roundRect">
+            <a:avLst>
+              <a:gd name="adj" fmla="val 5000"/>
+            </a:avLst>
+          </a:prstGeom>
+          <a:solidFill>
+            <a:srgbClr val="FFFFFF"/>
+          </a:solidFill>
+          <a:ln w="12700">
+            <a:solidFill>
+              <a:srgbClr val="D5DDE3"/>
+            </a:solidFill>
+          </a:ln>
+          <a:effectLst/>
+        </p:spPr>
+        <p:style>
+          <a:lnRef idx="1">
+            <a:schemeClr val="accent1"/>
+          </a:lnRef>
+          <a:fillRef idx="3">
+            <a:schemeClr val="accent1"/>
+          </a:fillRef>
+          <a:effectRef idx="2">
+            <a:schemeClr val="accent1"/>
+          </a:effectRef>
+          <a:fontRef idx="minor">
+            <a:schemeClr val="lt1"/>
+          </a:fontRef>
+        </p:style>
+        <p:txBody>
+          <a:bodyPr rtlCol="0" anchor="ctr"/>
+          <a:lstStyle/>
+          <a:p>
+            <a:pPr algn="ctr"/>
+          </a:p>
+        </p:txBody>
+      </p:sp>
+      <p:sp>
+        <p:nvSpPr>
+          <p:cNvPr id="13" name="Rectangle 12"/>
+          <p:cNvSpPr/>
+          <p:nvPr/>
+        </p:nvSpPr>
+        <p:spPr>
+          <a:xfrm>
+            <a:off x="502920" y="2514600"/>
+            <a:ext cx="5440680" cy="91440"/>
+          </a:xfrm>
+          <a:prstGeom prst="rect">
+            <a:avLst/>
+          </a:prstGeom>
+          <a:solidFill>
+            <a:srgbClr val="E0912F"/>
+          </a:solidFill>
+          <a:ln>
+            <a:noFill/>
+          </a:ln>
+          <a:effectLst/>
+        </p:spPr>
+        <p:style>
+          <a:lnRef idx="1">
+            <a:schemeClr val="accent1"/>
+          </a:lnRef>
+          <a:fillRef idx="3">
+            <a:schemeClr val="accent1"/>
+          </a:fillRef>
+          <a:effectRef idx="2">
+            <a:schemeClr val="accent1"/>
+          </a:effectRef>
+          <a:fontRef idx="minor">
+            <a:schemeClr val="lt1"/>
+          </a:fontRef>
+        </p:style>
+        <p:txBody>
+          <a:bodyPr rtlCol="0" anchor="ctr"/>
+          <a:lstStyle/>
+          <a:p>
+            <a:pPr algn="ctr"/>
+          </a:p>
+        </p:txBody>
+      </p:sp>
+      <p:sp>
+        <p:nvSpPr>
+          <p:cNvPr id="14" name="TextBox 13"/>
+          <p:cNvSpPr txBox="1"/>
+          <p:nvPr/>
+        </p:nvSpPr>
+        <p:spPr>
+          <a:xfrm>
+            <a:off x="777240" y="2752344"/>
+            <a:ext cx="4983480" cy="237744"/>
+          </a:xfrm>
+          <a:prstGeom prst="rect">
+            <a:avLst/>
+          </a:prstGeom>
+          <a:noFill/>
+        </p:spPr>
+        <p:txBody>
+          <a:bodyPr wrap="square" lIns="0" rIns="0" tIns="0" bIns="0" anchor="t">
+            <a:spAutoFit/>
+          </a:bodyPr>
+          <a:lstStyle/>
+          <a:p>
+            <a:pPr algn="l"/>
+            <a:r>
+              <a:rPr sz="950" b="1">
+                <a:solidFill>
+                  <a:srgbClr val="E0912F"/>
+                </a:solidFill>
+                <a:latin typeface="Segoe UI"/>
+              </a:rPr>
+              <a:t>ARCHITECTURE</a:t>
+            </a:r>
+          </a:p>
+        </p:txBody>
+      </p:sp>
+      <p:sp>
+        <p:nvSpPr>
+          <p:cNvPr id="15" name="TextBox 14"/>
+          <p:cNvSpPr txBox="1"/>
+          <p:nvPr/>
+        </p:nvSpPr>
+        <p:spPr>
+          <a:xfrm>
+            <a:off x="777240" y="3008376"/>
+            <a:ext cx="4983480" cy="365760"/>
+          </a:xfrm>
+          <a:prstGeom prst="rect">
+            <a:avLst/>
+          </a:prstGeom>
+          <a:noFill/>
+        </p:spPr>
+        <p:txBody>
+          <a:bodyPr wrap="square" lIns="0" rIns="0" tIns="0" bIns="0" anchor="t">
+            <a:spAutoFit/>
+          </a:bodyPr>
+          <a:lstStyle/>
+          <a:p>
+            <a:pPr algn="l"/>
+            <a:r>
+              <a:rPr sz="1500" b="1">
+                <a:solidFill>
+                  <a:srgbClr val="112A40"/>
+                </a:solidFill>
+                <a:latin typeface="Segoe UI Semibold"/>
+              </a:rPr>
+              <a:t>One service, one origin</a:t>
+            </a:r>
+          </a:p>
+        </p:txBody>
+      </p:sp>
+      <p:sp>
+        <p:nvSpPr>
+          <p:cNvPr id="16" name="TextBox 15"/>
+          <p:cNvSpPr txBox="1"/>
+          <p:nvPr/>
+        </p:nvSpPr>
+        <p:spPr>
+          <a:xfrm>
+            <a:off x="777240" y="3410712"/>
+            <a:ext cx="4937760" cy="740664"/>
+          </a:xfrm>
+          <a:prstGeom prst="rect">
+            <a:avLst/>
+          </a:prstGeom>
+          <a:noFill/>
+        </p:spPr>
+        <p:txBody>
+          <a:bodyPr wrap="square" lIns="0" rIns="0" tIns="0" bIns="0" anchor="t">
+            <a:spAutoFit/>
+          </a:bodyPr>
+          <a:lstStyle/>
+          <a:p>
+            <a:pPr algn="l">
+              <a:lnSpc>
+                <a:spcPct val="108000"/>
+              </a:lnSpc>
+            </a:pPr>
+            <a:r>
+              <a:rPr sz="1050" b="0">
+                <a:solidFill>
+                  <a:srgbClr val="5A6B78"/>
+                </a:solidFill>
+                <a:latin typeface="Segoe UI"/>
+              </a:rPr>
+              <a:t>The Express API also serves the SPA — a single origin, so no CORS or cross-domain cookie config. Simpler and more secure.</a:t>
+            </a:r>
+          </a:p>
+        </p:txBody>
+      </p:sp>
+      <p:sp>
+        <p:nvSpPr>
+          <p:cNvPr id="17" name="Rounded Rectangle 16"/>
+          <p:cNvSpPr/>
+          <p:nvPr/>
+        </p:nvSpPr>
+        <p:spPr>
+          <a:xfrm>
+            <a:off x="6254496" y="2514600"/>
+            <a:ext cx="5440680" cy="1700784"/>
+          </a:xfrm>
+          <a:prstGeom prst="roundRect">
+            <a:avLst>
+              <a:gd name="adj" fmla="val 5000"/>
+            </a:avLst>
+          </a:prstGeom>
+          <a:solidFill>
+            <a:srgbClr val="FFFFFF"/>
+          </a:solidFill>
+          <a:ln w="12700">
+            <a:solidFill>
+              <a:srgbClr val="D5DDE3"/>
+            </a:solidFill>
+          </a:ln>
+          <a:effectLst/>
+        </p:spPr>
+        <p:style>
+          <a:lnRef idx="1">
+            <a:schemeClr val="accent1"/>
+          </a:lnRef>
+          <a:fillRef idx="3">
+            <a:schemeClr val="accent1"/>
+          </a:fillRef>
+          <a:effectRef idx="2">
+            <a:schemeClr val="accent1"/>
+          </a:effectRef>
+          <a:fontRef idx="minor">
+            <a:schemeClr val="lt1"/>
+          </a:fontRef>
+        </p:style>
+        <p:txBody>
+          <a:bodyPr rtlCol="0" anchor="ctr"/>
+          <a:lstStyle/>
+          <a:p>
+            <a:pPr algn="ctr"/>
+          </a:p>
+        </p:txBody>
+      </p:sp>
+      <p:sp>
+        <p:nvSpPr>
+          <p:cNvPr id="18" name="Rectangle 17"/>
+          <p:cNvSpPr/>
+          <p:nvPr/>
+        </p:nvSpPr>
+        <p:spPr>
+          <a:xfrm>
+            <a:off x="6254496" y="2514600"/>
+            <a:ext cx="5440680" cy="91440"/>
+          </a:xfrm>
+          <a:prstGeom prst="rect">
+            <a:avLst/>
+          </a:prstGeom>
+          <a:solidFill>
+            <a:srgbClr val="E0912F"/>
+          </a:solidFill>
+          <a:ln>
+            <a:noFill/>
+          </a:ln>
+          <a:effectLst/>
+        </p:spPr>
+        <p:style>
+          <a:lnRef idx="1">
+            <a:schemeClr val="accent1"/>
+          </a:lnRef>
+          <a:fillRef idx="3">
+            <a:schemeClr val="accent1"/>
+          </a:fillRef>
+          <a:effectRef idx="2">
+            <a:schemeClr val="accent1"/>
+          </a:effectRef>
+          <a:fontRef idx="minor">
+            <a:schemeClr val="lt1"/>
+          </a:fontRef>
+        </p:style>
+        <p:txBody>
+          <a:bodyPr rtlCol="0" anchor="ctr"/>
+          <a:lstStyle/>
+          <a:p>
+            <a:pPr algn="ctr"/>
+          </a:p>
+        </p:txBody>
+      </p:sp>
+      <p:sp>
+        <p:nvSpPr>
+          <p:cNvPr id="19" name="TextBox 18"/>
+          <p:cNvSpPr txBox="1"/>
+          <p:nvPr/>
+        </p:nvSpPr>
+        <p:spPr>
+          <a:xfrm>
+            <a:off x="6528816" y="2752344"/>
+            <a:ext cx="4983480" cy="237744"/>
+          </a:xfrm>
+          <a:prstGeom prst="rect">
+            <a:avLst/>
+          </a:prstGeom>
+          <a:noFill/>
+        </p:spPr>
+        <p:txBody>
+          <a:bodyPr wrap="square" lIns="0" rIns="0" tIns="0" bIns="0" anchor="t">
+            <a:spAutoFit/>
+          </a:bodyPr>
+          <a:lstStyle/>
+          <a:p>
+            <a:pPr algn="l"/>
+            <a:r>
+              <a:rPr sz="950" b="1">
+                <a:solidFill>
+                  <a:srgbClr val="E0912F"/>
+                </a:solidFill>
+                <a:latin typeface="Segoe UI"/>
+              </a:rPr>
+              <a:t>DATABASE</a:t>
+            </a:r>
+          </a:p>
+        </p:txBody>
+      </p:sp>
+      <p:sp>
+        <p:nvSpPr>
+          <p:cNvPr id="20" name="TextBox 19"/>
+          <p:cNvSpPr txBox="1"/>
+          <p:nvPr/>
+        </p:nvSpPr>
+        <p:spPr>
+          <a:xfrm>
+            <a:off x="6528816" y="3008376"/>
+            <a:ext cx="4983480" cy="365760"/>
+          </a:xfrm>
+          <a:prstGeom prst="rect">
+            <a:avLst/>
+          </a:prstGeom>
+          <a:noFill/>
+        </p:spPr>
+        <p:txBody>
+          <a:bodyPr wrap="square" lIns="0" rIns="0" tIns="0" bIns="0" anchor="t">
+            <a:spAutoFit/>
+          </a:bodyPr>
+          <a:lstStyle/>
+          <a:p>
+            <a:pPr algn="l"/>
+            <a:r>
+              <a:rPr sz="1500" b="1">
+                <a:solidFill>
+                  <a:srgbClr val="112A40"/>
+                </a:solidFill>
+                <a:latin typeface="Segoe UI Semibold"/>
+              </a:rPr>
+              <a:t>Managed Postgres, TLS on</a:t>
+            </a:r>
+          </a:p>
+        </p:txBody>
+      </p:sp>
+      <p:sp>
+        <p:nvSpPr>
+          <p:cNvPr id="21" name="TextBox 20"/>
+          <p:cNvSpPr txBox="1"/>
+          <p:nvPr/>
+        </p:nvSpPr>
+        <p:spPr>
+          <a:xfrm>
+            <a:off x="6528816" y="3410712"/>
+            <a:ext cx="4937760" cy="740664"/>
+          </a:xfrm>
+          <a:prstGeom prst="rect">
+            <a:avLst/>
+          </a:prstGeom>
+          <a:noFill/>
+        </p:spPr>
+        <p:txBody>
+          <a:bodyPr wrap="square" lIns="0" rIns="0" tIns="0" bIns="0" anchor="t">
+            <a:spAutoFit/>
+          </a:bodyPr>
+          <a:lstStyle/>
+          <a:p>
+            <a:pPr algn="l">
+              <a:lnSpc>
+                <a:spcPct val="108000"/>
+              </a:lnSpc>
+            </a:pPr>
+            <a:r>
+              <a:rPr sz="1050" b="0">
+                <a:solidFill>
+                  <a:srgbClr val="5A6B78"/>
+                </a:solidFill>
+                <a:latin typeface="Segoe UI"/>
+              </a:rPr>
+              <a:t>A single DATABASE_URL with automatic TLS runs on Render, Neon, Railway, Supabase or RDS — zero code change from local dev.</a:t>
+            </a:r>
+          </a:p>
+        </p:txBody>
+      </p:sp>
+      <p:sp>
+        <p:nvSpPr>
+          <p:cNvPr id="22" name="Rounded Rectangle 21"/>
+          <p:cNvSpPr/>
+          <p:nvPr/>
+        </p:nvSpPr>
+        <p:spPr>
+          <a:xfrm>
+            <a:off x="502920" y="4343400"/>
+            <a:ext cx="5440680" cy="1700784"/>
+          </a:xfrm>
+          <a:prstGeom prst="roundRect">
+            <a:avLst>
+              <a:gd name="adj" fmla="val 5000"/>
+            </a:avLst>
+          </a:prstGeom>
+          <a:solidFill>
+            <a:srgbClr val="FFFFFF"/>
+          </a:solidFill>
+          <a:ln w="12700">
+            <a:solidFill>
+              <a:srgbClr val="D5DDE3"/>
+            </a:solidFill>
+          </a:ln>
+          <a:effectLst/>
+        </p:spPr>
+        <p:style>
+          <a:lnRef idx="1">
+            <a:schemeClr val="accent1"/>
+          </a:lnRef>
+          <a:fillRef idx="3">
+            <a:schemeClr val="accent1"/>
+          </a:fillRef>
+          <a:effectRef idx="2">
+            <a:schemeClr val="accent1"/>
+          </a:effectRef>
+          <a:fontRef idx="minor">
+            <a:schemeClr val="lt1"/>
+          </a:fontRef>
+        </p:style>
+        <p:txBody>
+          <a:bodyPr rtlCol="0" anchor="ctr"/>
+          <a:lstStyle/>
+          <a:p>
+            <a:pPr algn="ctr"/>
+          </a:p>
+        </p:txBody>
+      </p:sp>
+      <p:sp>
+        <p:nvSpPr>
+          <p:cNvPr id="23" name="Rectangle 22"/>
+          <p:cNvSpPr/>
+          <p:nvPr/>
+        </p:nvSpPr>
+        <p:spPr>
+          <a:xfrm>
+            <a:off x="502920" y="4343400"/>
+            <a:ext cx="5440680" cy="91440"/>
+          </a:xfrm>
+          <a:prstGeom prst="rect">
+            <a:avLst/>
+          </a:prstGeom>
+          <a:solidFill>
+            <a:srgbClr val="E0912F"/>
+          </a:solidFill>
+          <a:ln>
+            <a:noFill/>
+          </a:ln>
+          <a:effectLst/>
+        </p:spPr>
+        <p:style>
+          <a:lnRef idx="1">
+            <a:schemeClr val="accent1"/>
+          </a:lnRef>
+          <a:fillRef idx="3">
+            <a:schemeClr val="accent1"/>
+          </a:fillRef>
+          <a:effectRef idx="2">
+            <a:schemeClr val="accent1"/>
+          </a:effectRef>
+          <a:fontRef idx="minor">
+            <a:schemeClr val="lt1"/>
+          </a:fontRef>
+        </p:style>
+        <p:txBody>
+          <a:bodyPr rtlCol="0" anchor="ctr"/>
+          <a:lstStyle/>
+          <a:p>
+            <a:pPr algn="ctr"/>
+          </a:p>
+        </p:txBody>
+      </p:sp>
+      <p:sp>
+        <p:nvSpPr>
+          <p:cNvPr id="24" name="TextBox 23"/>
+          <p:cNvSpPr txBox="1"/>
+          <p:nvPr/>
+        </p:nvSpPr>
+        <p:spPr>
+          <a:xfrm>
+            <a:off x="777240" y="4581144"/>
+            <a:ext cx="4983480" cy="237744"/>
+          </a:xfrm>
+          <a:prstGeom prst="rect">
+            <a:avLst/>
+          </a:prstGeom>
+          <a:noFill/>
+        </p:spPr>
+        <p:txBody>
+          <a:bodyPr wrap="square" lIns="0" rIns="0" tIns="0" bIns="0" anchor="t">
+            <a:spAutoFit/>
+          </a:bodyPr>
+          <a:lstStyle/>
+          <a:p>
+            <a:pPr algn="l"/>
+            <a:r>
+              <a:rPr sz="950" b="1">
+                <a:solidFill>
+                  <a:srgbClr val="E0912F"/>
+                </a:solidFill>
+                <a:latin typeface="Segoe UI"/>
+              </a:rPr>
+              <a:t>HARDENED</a:t>
+            </a:r>
+          </a:p>
+        </p:txBody>
+      </p:sp>
+      <p:sp>
+        <p:nvSpPr>
+          <p:cNvPr id="25" name="TextBox 24"/>
+          <p:cNvSpPr txBox="1"/>
+          <p:nvPr/>
+        </p:nvSpPr>
+        <p:spPr>
+          <a:xfrm>
+            <a:off x="777240" y="4837176"/>
+            <a:ext cx="4983480" cy="365760"/>
+          </a:xfrm>
+          <a:prstGeom prst="rect">
+            <a:avLst/>
+          </a:prstGeom>
+          <a:noFill/>
+        </p:spPr>
+        <p:txBody>
+          <a:bodyPr wrap="square" lIns="0" rIns="0" tIns="0" bIns="0" anchor="t">
+            <a:spAutoFit/>
+          </a:bodyPr>
+          <a:lstStyle/>
+          <a:p>
+            <a:pPr algn="l"/>
+            <a:r>
+              <a:rPr sz="1500" b="1">
+                <a:solidFill>
+                  <a:srgbClr val="112A40"/>
+                </a:solidFill>
+                <a:latin typeface="Segoe UI Semibold"/>
+              </a:rPr>
+              <a:t>Production-ready by default</a:t>
+            </a:r>
+          </a:p>
+        </p:txBody>
+      </p:sp>
+      <p:sp>
+        <p:nvSpPr>
+          <p:cNvPr id="26" name="TextBox 25"/>
+          <p:cNvSpPr txBox="1"/>
+          <p:nvPr/>
+        </p:nvSpPr>
+        <p:spPr>
+          <a:xfrm>
+            <a:off x="777240" y="5239512"/>
+            <a:ext cx="4937760" cy="740664"/>
+          </a:xfrm>
+          <a:prstGeom prst="rect">
+            <a:avLst/>
+          </a:prstGeom>
+          <a:noFill/>
+        </p:spPr>
+        <p:txBody>
+          <a:bodyPr wrap="square" lIns="0" rIns="0" tIns="0" bIns="0" anchor="t">
+            <a:spAutoFit/>
+          </a:bodyPr>
+          <a:lstStyle/>
+          <a:p>
+            <a:pPr algn="l">
+              <a:lnSpc>
+                <a:spcPct val="108000"/>
+              </a:lnSpc>
+            </a:pPr>
+            <a:r>
+              <a:rPr sz="1050" b="0">
+                <a:solidFill>
+                  <a:srgbClr val="5A6B78"/>
+                </a:solidFill>
+                <a:latin typeface="Segoe UI"/>
+              </a:rPr>
+              <a:t>Secure cookies, HSTS, HTTPS-only, a boot check that refuses a weak JWT secret, and one-time rotation of every seeded password.</a:t>
+            </a:r>
+          </a:p>
+        </p:txBody>
+      </p:sp>
+      <p:sp>
+        <p:nvSpPr>
+          <p:cNvPr id="27" name="Rounded Rectangle 26"/>
+          <p:cNvSpPr/>
+          <p:nvPr/>
+        </p:nvSpPr>
+        <p:spPr>
+          <a:xfrm>
+            <a:off x="6254496" y="4343400"/>
+            <a:ext cx="5440680" cy="1700784"/>
+          </a:xfrm>
+          <a:prstGeom prst="roundRect">
+            <a:avLst>
+              <a:gd name="adj" fmla="val 5000"/>
+            </a:avLst>
+          </a:prstGeom>
+          <a:solidFill>
+            <a:srgbClr val="FFFFFF"/>
+          </a:solidFill>
+          <a:ln w="12700">
+            <a:solidFill>
+              <a:srgbClr val="D5DDE3"/>
+            </a:solidFill>
+          </a:ln>
+          <a:effectLst/>
+        </p:spPr>
+        <p:style>
+          <a:lnRef idx="1">
+            <a:schemeClr val="accent1"/>
+          </a:lnRef>
+          <a:fillRef idx="3">
+            <a:schemeClr val="accent1"/>
+          </a:fillRef>
+          <a:effectRef idx="2">
+            <a:schemeClr val="accent1"/>
+          </a:effectRef>
+          <a:fontRef idx="minor">
+            <a:schemeClr val="lt1"/>
+          </a:fontRef>
+        </p:style>
+        <p:txBody>
+          <a:bodyPr rtlCol="0" anchor="ctr"/>
+          <a:lstStyle/>
+          <a:p>
+            <a:pPr algn="ctr"/>
+          </a:p>
+        </p:txBody>
+      </p:sp>
+      <p:sp>
+        <p:nvSpPr>
+          <p:cNvPr id="28" name="Rectangle 27"/>
+          <p:cNvSpPr/>
+          <p:nvPr/>
+        </p:nvSpPr>
+        <p:spPr>
+          <a:xfrm>
+            <a:off x="6254496" y="4343400"/>
+            <a:ext cx="5440680" cy="91440"/>
+          </a:xfrm>
+          <a:prstGeom prst="rect">
+            <a:avLst/>
+          </a:prstGeom>
+          <a:solidFill>
+            <a:srgbClr val="E0912F"/>
+          </a:solidFill>
+          <a:ln>
+            <a:noFill/>
+          </a:ln>
+          <a:effectLst/>
+        </p:spPr>
+        <p:style>
+          <a:lnRef idx="1">
+            <a:schemeClr val="accent1"/>
+          </a:lnRef>
+          <a:fillRef idx="3">
+            <a:schemeClr val="accent1"/>
+          </a:fillRef>
+          <a:effectRef idx="2">
+            <a:schemeClr val="accent1"/>
+          </a:effectRef>
+          <a:fontRef idx="minor">
+            <a:schemeClr val="lt1"/>
+          </a:fontRef>
+        </p:style>
+        <p:txBody>
+          <a:bodyPr rtlCol="0" anchor="ctr"/>
+          <a:lstStyle/>
+          <a:p>
+            <a:pPr algn="ctr"/>
+          </a:p>
+        </p:txBody>
+      </p:sp>
+      <p:sp>
+        <p:nvSpPr>
+          <p:cNvPr id="29" name="TextBox 28"/>
+          <p:cNvSpPr txBox="1"/>
+          <p:nvPr/>
+        </p:nvSpPr>
+        <p:spPr>
+          <a:xfrm>
+            <a:off x="6528816" y="4581144"/>
+            <a:ext cx="4983480" cy="237744"/>
+          </a:xfrm>
+          <a:prstGeom prst="rect">
+            <a:avLst/>
+          </a:prstGeom>
+          <a:noFill/>
+        </p:spPr>
+        <p:txBody>
+          <a:bodyPr wrap="square" lIns="0" rIns="0" tIns="0" bIns="0" anchor="t">
+            <a:spAutoFit/>
+          </a:bodyPr>
+          <a:lstStyle/>
+          <a:p>
+            <a:pPr algn="l"/>
+            <a:r>
+              <a:rPr sz="950" b="1">
+                <a:solidFill>
+                  <a:srgbClr val="E0912F"/>
+                </a:solidFill>
+                <a:latin typeface="Segoe UI"/>
+              </a:rPr>
+              <a:t>EMAIL</a:t>
+            </a:r>
+          </a:p>
+        </p:txBody>
+      </p:sp>
+      <p:sp>
+        <p:nvSpPr>
+          <p:cNvPr id="30" name="TextBox 29"/>
+          <p:cNvSpPr txBox="1"/>
+          <p:nvPr/>
+        </p:nvSpPr>
+        <p:spPr>
+          <a:xfrm>
+            <a:off x="6528816" y="4837176"/>
+            <a:ext cx="4983480" cy="365760"/>
+          </a:xfrm>
+          <a:prstGeom prst="rect">
+            <a:avLst/>
+          </a:prstGeom>
+          <a:noFill/>
+        </p:spPr>
+        <p:txBody>
+          <a:bodyPr wrap="square" lIns="0" rIns="0" tIns="0" bIns="0" anchor="t">
+            <a:spAutoFit/>
+          </a:bodyPr>
+          <a:lstStyle/>
+          <a:p>
+            <a:pPr algn="l"/>
+            <a:r>
+              <a:rPr sz="1500" b="1">
+                <a:solidFill>
+                  <a:srgbClr val="112A40"/>
+                </a:solidFill>
+                <a:latin typeface="Segoe UI Semibold"/>
+              </a:rPr>
+              <a:t>Real inbox delivery</a:t>
+            </a:r>
+          </a:p>
+        </p:txBody>
+      </p:sp>
+      <p:sp>
+        <p:nvSpPr>
+          <p:cNvPr id="31" name="TextBox 30"/>
+          <p:cNvSpPr txBox="1"/>
+          <p:nvPr/>
+        </p:nvSpPr>
+        <p:spPr>
+          <a:xfrm>
+            <a:off x="6528816" y="5239512"/>
+            <a:ext cx="4937760" cy="740664"/>
+          </a:xfrm>
+          <a:prstGeom prst="rect">
+            <a:avLst/>
+          </a:prstGeom>
+          <a:noFill/>
+        </p:spPr>
+        <p:txBody>
+          <a:bodyPr wrap="square" lIns="0" rIns="0" tIns="0" bIns="0" anchor="t">
+            <a:spAutoFit/>
+          </a:bodyPr>
+          <a:lstStyle/>
+          <a:p>
+            <a:pPr algn="l">
+              <a:lnSpc>
+                <a:spcPct val="108000"/>
+              </a:lnSpc>
+            </a:pPr>
+            <a:r>
+              <a:rPr sz="1050" b="0">
+                <a:solidFill>
+                  <a:srgbClr val="5A6B78"/>
+                </a:solidFill>
+                <a:latin typeface="Segoe UI"/>
+              </a:rPr>
+              <a:t>Customer and staff notifications go out over SMTP (Gmail / Brevo / any relay) and are mirrored to the in-app Emails trail.</a:t>
             </a:r>
           </a:p>
         </p:txBody>

--- a/CCMS-Presentation.pptx
+++ b/CCMS-Presentation.pptx
@@ -7165,7 +7165,7 @@
         <p:spPr>
           <a:xfrm>
             <a:off x="502920" y="4828032"/>
-            <a:ext cx="11192256" cy="960120"/>
+            <a:ext cx="11192256" cy="1234440"/>
           </a:xfrm>
           <a:prstGeom prst="roundRect">
             <a:avLst/>
@@ -17933,7 +17933,7 @@
                 </a:solidFill>
                 <a:latin typeface="Segoe UI"/>
               </a:rPr>
-              <a:t>We need more information to proceed — reply to resume</a:t>
+              <a:t>We need more info — reply to resume</a:t>
             </a:r>
           </a:p>
         </p:txBody>
@@ -18173,7 +18173,7 @@
                 </a:solidFill>
                 <a:latin typeface="Segoe UI"/>
               </a:rPr>
-              <a:t>No customer response within the 30-day SLA window</a:t>
+              <a:t>No reply within the 30-day SLA window</a:t>
             </a:r>
           </a:p>
         </p:txBody>
@@ -19725,7 +19725,7 @@
         <p:spPr>
           <a:xfrm>
             <a:off x="0" y="0"/>
-            <a:ext cx="12191695" cy="6858000"/>
+            <a:ext cx="12191695" cy="1170432"/>
           </a:xfrm>
           <a:prstGeom prst="rect">
             <a:avLst/>
@@ -19768,8 +19768,8 @@
         </p:nvSpPr>
         <p:spPr>
           <a:xfrm>
-            <a:off x="0" y="0"/>
-            <a:ext cx="256032" cy="6858000"/>
+            <a:off x="0" y="1170432"/>
+            <a:ext cx="12191695" cy="54864"/>
           </a:xfrm>
           <a:prstGeom prst="rect">
             <a:avLst/>
@@ -19812,8 +19812,8 @@
         </p:nvSpPr>
         <p:spPr>
           <a:xfrm>
-            <a:off x="822960" y="1005840"/>
-            <a:ext cx="10058400" cy="457200"/>
+            <a:off x="502920" y="219456"/>
+            <a:ext cx="10058400" cy="274320"/>
           </a:xfrm>
           <a:prstGeom prst="rect">
             <a:avLst/>
@@ -19821,30 +19821,20 @@
           <a:noFill/>
         </p:spPr>
         <p:txBody>
-          <a:bodyPr wrap="square" anchor="t" lIns="0" rIns="0" tIns="0" bIns="0">
+          <a:bodyPr wrap="square" lIns="0" rIns="0" tIns="0" bIns="0" anchor="t">
             <a:spAutoFit/>
           </a:bodyPr>
           <a:lstStyle/>
           <a:p>
-            <a:pPr algn="l">
-              <a:lnSpc>
-                <a:spcPct val="100000"/>
-              </a:lnSpc>
-              <a:spcBef>
-                <a:spcPts val="0"/>
-              </a:spcBef>
-              <a:spcAft>
-                <a:spcPts val="400"/>
-              </a:spcAft>
-            </a:pPr>
-            <a:r>
-              <a:rPr sz="1300" b="1">
+            <a:pPr algn="l"/>
+            <a:r>
+              <a:rPr sz="1100" b="1">
                 <a:solidFill>
                   <a:srgbClr val="E0912F"/>
                 </a:solidFill>
                 <a:latin typeface="Segoe UI"/>
               </a:rPr>
-              <a:t>CONCLUSION</a:t>
+              <a:t>09 · DEPLOYMENT</a:t>
             </a:r>
           </a:p>
         </p:txBody>
@@ -19857,8 +19847,8 @@
         </p:nvSpPr>
         <p:spPr>
           <a:xfrm>
-            <a:off x="777240" y="1371600"/>
-            <a:ext cx="10607040" cy="1371600"/>
+            <a:off x="502920" y="457200"/>
+            <a:ext cx="11155680" cy="640080"/>
           </a:xfrm>
           <a:prstGeom prst="rect">
             <a:avLst/>
@@ -19866,69 +19856,199 @@
           <a:noFill/>
         </p:spPr>
         <p:txBody>
-          <a:bodyPr wrap="square" anchor="t" lIns="0" rIns="0" tIns="0" bIns="0">
+          <a:bodyPr wrap="square" lIns="0" rIns="0" tIns="0" bIns="0" anchor="t">
             <a:spAutoFit/>
           </a:bodyPr>
           <a:lstStyle/>
           <a:p>
-            <a:pPr algn="l">
-              <a:lnSpc>
-                <a:spcPct val="100000"/>
-              </a:lnSpc>
-              <a:spcBef>
-                <a:spcPts val="0"/>
-              </a:spcBef>
-              <a:spcAft>
-                <a:spcPts val="200"/>
-              </a:spcAft>
-            </a:pPr>
-            <a:r>
-              <a:rPr sz="3400" b="1">
+            <a:pPr algn="l"/>
+            <a:r>
+              <a:rPr sz="2600" b="1">
                 <a:solidFill>
                   <a:srgbClr val="FFFFFF"/>
                 </a:solidFill>
                 <a:latin typeface="Segoe UI Semibold"/>
               </a:rPr>
-              <a:t>A complete, governed, SAP-ready</a:t>
-            </a:r>
-          </a:p>
-          <a:p>
-            <a:pPr algn="l">
-              <a:lnSpc>
-                <a:spcPct val="100000"/>
-              </a:lnSpc>
-              <a:spcBef>
-                <a:spcPts val="0"/>
-              </a:spcBef>
-              <a:spcAft>
-                <a:spcPts val="200"/>
-              </a:spcAft>
-            </a:pPr>
-            <a:r>
-              <a:rPr sz="3400" b="1">
-                <a:solidFill>
-                  <a:srgbClr val="FFFFFF"/>
-                </a:solidFill>
-                <a:latin typeface="Segoe UI Semibold"/>
-              </a:rPr>
-              <a:t>complaint management platform.</a:t>
-            </a:r>
-          </a:p>
-        </p:txBody>
-      </p:sp>
-      <p:sp>
-        <p:nvSpPr>
-          <p:cNvPr id="6" name="Oval 5"/>
+              <a:t>Deployed live on the internet</a:t>
+            </a:r>
+          </a:p>
+        </p:txBody>
+      </p:sp>
+      <p:sp>
+        <p:nvSpPr>
+          <p:cNvPr id="6" name="Rectangle 5"/>
           <p:cNvSpPr/>
           <p:nvPr/>
         </p:nvSpPr>
         <p:spPr>
           <a:xfrm>
-            <a:off x="822960" y="2944368"/>
-            <a:ext cx="146304" cy="146304"/>
-          </a:xfrm>
-          <a:prstGeom prst="ellipse">
-            <a:avLst/>
+            <a:off x="0" y="6510528"/>
+            <a:ext cx="12191695" cy="347472"/>
+          </a:xfrm>
+          <a:prstGeom prst="rect">
+            <a:avLst/>
+          </a:prstGeom>
+          <a:solidFill>
+            <a:srgbClr val="112A40"/>
+          </a:solidFill>
+          <a:ln>
+            <a:noFill/>
+          </a:ln>
+          <a:effectLst/>
+        </p:spPr>
+        <p:style>
+          <a:lnRef idx="1">
+            <a:schemeClr val="accent1"/>
+          </a:lnRef>
+          <a:fillRef idx="3">
+            <a:schemeClr val="accent1"/>
+          </a:fillRef>
+          <a:effectRef idx="2">
+            <a:schemeClr val="accent1"/>
+          </a:effectRef>
+          <a:fontRef idx="minor">
+            <a:schemeClr val="lt1"/>
+          </a:fontRef>
+        </p:style>
+        <p:txBody>
+          <a:bodyPr rtlCol="0" anchor="ctr"/>
+          <a:lstStyle/>
+          <a:p>
+            <a:pPr algn="ctr"/>
+          </a:p>
+        </p:txBody>
+      </p:sp>
+      <p:sp>
+        <p:nvSpPr>
+          <p:cNvPr id="7" name="TextBox 6"/>
+          <p:cNvSpPr txBox="1"/>
+          <p:nvPr/>
+        </p:nvSpPr>
+        <p:spPr>
+          <a:xfrm>
+            <a:off x="502920" y="6528816"/>
+            <a:ext cx="7315200" cy="310896"/>
+          </a:xfrm>
+          <a:prstGeom prst="rect">
+            <a:avLst/>
+          </a:prstGeom>
+          <a:noFill/>
+        </p:spPr>
+        <p:txBody>
+          <a:bodyPr wrap="square" lIns="0" rIns="0" tIns="0" bIns="0" anchor="t">
+            <a:spAutoFit/>
+          </a:bodyPr>
+          <a:lstStyle/>
+          <a:p>
+            <a:pPr algn="l"/>
+            <a:r>
+              <a:rPr sz="900" b="0">
+                <a:solidFill>
+                  <a:srgbClr val="B9C7D2"/>
+                </a:solidFill>
+                <a:latin typeface="Segoe UI"/>
+              </a:rPr>
+              <a:t>Customer Complaint Management System  ·  Orient Paper &amp; Mill</a:t>
+            </a:r>
+          </a:p>
+        </p:txBody>
+      </p:sp>
+      <p:sp>
+        <p:nvSpPr>
+          <p:cNvPr id="8" name="TextBox 7"/>
+          <p:cNvSpPr txBox="1"/>
+          <p:nvPr/>
+        </p:nvSpPr>
+        <p:spPr>
+          <a:xfrm>
+            <a:off x="10424160" y="6528816"/>
+            <a:ext cx="1280160" cy="310896"/>
+          </a:xfrm>
+          <a:prstGeom prst="rect">
+            <a:avLst/>
+          </a:prstGeom>
+          <a:noFill/>
+        </p:spPr>
+        <p:txBody>
+          <a:bodyPr wrap="square" lIns="0" rIns="0" tIns="0" bIns="0" anchor="t">
+            <a:spAutoFit/>
+          </a:bodyPr>
+          <a:lstStyle/>
+          <a:p>
+            <a:pPr algn="r"/>
+            <a:r>
+              <a:rPr sz="900" b="1">
+                <a:solidFill>
+                  <a:srgbClr val="E0912F"/>
+                </a:solidFill>
+                <a:latin typeface="Segoe UI"/>
+              </a:rPr>
+              <a:t>18</a:t>
+            </a:r>
+          </a:p>
+        </p:txBody>
+      </p:sp>
+      <p:sp>
+        <p:nvSpPr>
+          <p:cNvPr id="9" name="Rounded Rectangle 8"/>
+          <p:cNvSpPr/>
+          <p:nvPr/>
+        </p:nvSpPr>
+        <p:spPr>
+          <a:xfrm>
+            <a:off x="502920" y="1463040"/>
+            <a:ext cx="11183112" cy="841248"/>
+          </a:xfrm>
+          <a:prstGeom prst="roundRect">
+            <a:avLst>
+              <a:gd name="adj" fmla="val 10000"/>
+            </a:avLst>
+          </a:prstGeom>
+          <a:solidFill>
+            <a:srgbClr val="EEF2F5"/>
+          </a:solidFill>
+          <a:ln>
+            <a:noFill/>
+          </a:ln>
+          <a:effectLst/>
+        </p:spPr>
+        <p:style>
+          <a:lnRef idx="1">
+            <a:schemeClr val="accent1"/>
+          </a:lnRef>
+          <a:fillRef idx="3">
+            <a:schemeClr val="accent1"/>
+          </a:fillRef>
+          <a:effectRef idx="2">
+            <a:schemeClr val="accent1"/>
+          </a:effectRef>
+          <a:fontRef idx="minor">
+            <a:schemeClr val="lt1"/>
+          </a:fontRef>
+        </p:style>
+        <p:txBody>
+          <a:bodyPr rtlCol="0" anchor="ctr"/>
+          <a:lstStyle/>
+          <a:p>
+            <a:pPr algn="ctr"/>
+          </a:p>
+        </p:txBody>
+      </p:sp>
+      <p:sp>
+        <p:nvSpPr>
+          <p:cNvPr id="10" name="Rounded Rectangle 9"/>
+          <p:cNvSpPr/>
+          <p:nvPr/>
+        </p:nvSpPr>
+        <p:spPr>
+          <a:xfrm>
+            <a:off x="713232" y="1609344"/>
+            <a:ext cx="118872" cy="548640"/>
+          </a:xfrm>
+          <a:prstGeom prst="roundRect">
+            <a:avLst>
+              <a:gd name="adj" fmla="val 50000"/>
+            </a:avLst>
           </a:prstGeom>
           <a:solidFill>
             <a:srgbClr val="E0912F"/>
@@ -19962,14 +20082,14 @@
       </p:sp>
       <p:sp>
         <p:nvSpPr>
-          <p:cNvPr id="7" name="TextBox 6"/>
+          <p:cNvPr id="11" name="TextBox 10"/>
           <p:cNvSpPr txBox="1"/>
           <p:nvPr/>
         </p:nvSpPr>
         <p:spPr>
           <a:xfrm>
-            <a:off x="1143000" y="2880360"/>
-            <a:ext cx="9601200" cy="457200"/>
+            <a:off x="969264" y="1463040"/>
+            <a:ext cx="10424160" cy="841248"/>
           </a:xfrm>
           <a:prstGeom prst="rect">
             <a:avLst/>
@@ -19977,46 +20097,109 @@
           <a:noFill/>
         </p:spPr>
         <p:txBody>
-          <a:bodyPr wrap="square" anchor="t" lIns="0" rIns="0" tIns="0" bIns="0">
+          <a:bodyPr wrap="square" lIns="0" rIns="0" tIns="0" bIns="0" anchor="ctr">
             <a:spAutoFit/>
           </a:bodyPr>
           <a:lstStyle/>
           <a:p>
+            <a:pPr algn="l"/>
+            <a:r>
+              <a:rPr sz="1300" b="0">
+                <a:solidFill>
+                  <a:srgbClr val="1A2530"/>
+                </a:solidFill>
+                <a:latin typeface="Segoe UI"/>
+              </a:rPr>
+              <a:t>Live at  </a:t>
+            </a:r>
+            <a:r>
+              <a:rPr sz="1400" b="1">
+                <a:solidFill>
+                  <a:srgbClr val="112A40"/>
+                </a:solidFill>
+                <a:latin typeface="Segoe UI Semibold"/>
+              </a:rPr>
+              <a:t>https://ccms-6dut.onrender.com</a:t>
+            </a:r>
+          </a:p>
+          <a:p>
             <a:pPr algn="l">
-              <a:lnSpc>
-                <a:spcPct val="100000"/>
-              </a:lnSpc>
-              <a:spcBef>
+              <a:spcAft>
                 <a:spcPts val="0"/>
-              </a:spcBef>
-              <a:spcAft>
-                <a:spcPts val="400"/>
               </a:spcAft>
             </a:pPr>
             <a:r>
-              <a:rPr sz="1450" b="0">
-                <a:solidFill>
-                  <a:srgbClr val="D5DEE5"/>
+              <a:rPr sz="1100" b="0">
+                <a:solidFill>
+                  <a:srgbClr val="5A6B78"/>
                 </a:solidFill>
                 <a:latin typeface="Segoe UI"/>
               </a:rPr>
-              <a:t>Full 8-stage lifecycle with automated approval gates</a:t>
-            </a:r>
-          </a:p>
-        </p:txBody>
-      </p:sp>
-      <p:sp>
-        <p:nvSpPr>
-          <p:cNvPr id="8" name="Oval 7"/>
+              <a:t>Deployed as a single web service on managed PostgreSQL, with production security enabled.</a:t>
+            </a:r>
+          </a:p>
+        </p:txBody>
+      </p:sp>
+      <p:sp>
+        <p:nvSpPr>
+          <p:cNvPr id="12" name="Rounded Rectangle 11"/>
           <p:cNvSpPr/>
           <p:nvPr/>
         </p:nvSpPr>
         <p:spPr>
           <a:xfrm>
-            <a:off x="822960" y="3447288"/>
-            <a:ext cx="146304" cy="146304"/>
-          </a:xfrm>
-          <a:prstGeom prst="ellipse">
+            <a:off x="502920" y="2514600"/>
+            <a:ext cx="5440680" cy="1700784"/>
+          </a:xfrm>
+          <a:prstGeom prst="roundRect">
+            <a:avLst>
+              <a:gd name="adj" fmla="val 5000"/>
+            </a:avLst>
+          </a:prstGeom>
+          <a:solidFill>
+            <a:srgbClr val="FFFFFF"/>
+          </a:solidFill>
+          <a:ln w="12700">
+            <a:solidFill>
+              <a:srgbClr val="D5DDE3"/>
+            </a:solidFill>
+          </a:ln>
+          <a:effectLst/>
+        </p:spPr>
+        <p:style>
+          <a:lnRef idx="1">
+            <a:schemeClr val="accent1"/>
+          </a:lnRef>
+          <a:fillRef idx="3">
+            <a:schemeClr val="accent1"/>
+          </a:fillRef>
+          <a:effectRef idx="2">
+            <a:schemeClr val="accent1"/>
+          </a:effectRef>
+          <a:fontRef idx="minor">
+            <a:schemeClr val="lt1"/>
+          </a:fontRef>
+        </p:style>
+        <p:txBody>
+          <a:bodyPr rtlCol="0" anchor="ctr"/>
+          <a:lstStyle/>
+          <a:p>
+            <a:pPr algn="ctr"/>
+          </a:p>
+        </p:txBody>
+      </p:sp>
+      <p:sp>
+        <p:nvSpPr>
+          <p:cNvPr id="13" name="Rectangle 12"/>
+          <p:cNvSpPr/>
+          <p:nvPr/>
+        </p:nvSpPr>
+        <p:spPr>
+          <a:xfrm>
+            <a:off x="502920" y="2514600"/>
+            <a:ext cx="5440680" cy="91440"/>
+          </a:xfrm>
+          <a:prstGeom prst="rect">
             <a:avLst/>
           </a:prstGeom>
           <a:solidFill>
@@ -20051,14 +20234,14 @@
       </p:sp>
       <p:sp>
         <p:nvSpPr>
-          <p:cNvPr id="9" name="TextBox 8"/>
+          <p:cNvPr id="14" name="TextBox 13"/>
           <p:cNvSpPr txBox="1"/>
           <p:nvPr/>
         </p:nvSpPr>
         <p:spPr>
           <a:xfrm>
-            <a:off x="1143000" y="3383280"/>
-            <a:ext cx="9601200" cy="457200"/>
+            <a:off x="777240" y="2752344"/>
+            <a:ext cx="4983480" cy="237744"/>
           </a:xfrm>
           <a:prstGeom prst="rect">
             <a:avLst/>
@@ -20066,46 +20249,158 @@
           <a:noFill/>
         </p:spPr>
         <p:txBody>
-          <a:bodyPr wrap="square" anchor="t" lIns="0" rIns="0" tIns="0" bIns="0">
+          <a:bodyPr wrap="square" lIns="0" rIns="0" tIns="0" bIns="0" anchor="t">
             <a:spAutoFit/>
           </a:bodyPr>
           <a:lstStyle/>
           <a:p>
+            <a:pPr algn="l"/>
+            <a:r>
+              <a:rPr sz="950" b="1">
+                <a:solidFill>
+                  <a:srgbClr val="E0912F"/>
+                </a:solidFill>
+                <a:latin typeface="Segoe UI"/>
+              </a:rPr>
+              <a:t>ARCHITECTURE</a:t>
+            </a:r>
+          </a:p>
+        </p:txBody>
+      </p:sp>
+      <p:sp>
+        <p:nvSpPr>
+          <p:cNvPr id="15" name="TextBox 14"/>
+          <p:cNvSpPr txBox="1"/>
+          <p:nvPr/>
+        </p:nvSpPr>
+        <p:spPr>
+          <a:xfrm>
+            <a:off x="777240" y="3008376"/>
+            <a:ext cx="4983480" cy="365760"/>
+          </a:xfrm>
+          <a:prstGeom prst="rect">
+            <a:avLst/>
+          </a:prstGeom>
+          <a:noFill/>
+        </p:spPr>
+        <p:txBody>
+          <a:bodyPr wrap="square" lIns="0" rIns="0" tIns="0" bIns="0" anchor="t">
+            <a:spAutoFit/>
+          </a:bodyPr>
+          <a:lstStyle/>
+          <a:p>
+            <a:pPr algn="l"/>
+            <a:r>
+              <a:rPr sz="1500" b="1">
+                <a:solidFill>
+                  <a:srgbClr val="112A40"/>
+                </a:solidFill>
+                <a:latin typeface="Segoe UI Semibold"/>
+              </a:rPr>
+              <a:t>One service, one origin</a:t>
+            </a:r>
+          </a:p>
+        </p:txBody>
+      </p:sp>
+      <p:sp>
+        <p:nvSpPr>
+          <p:cNvPr id="16" name="TextBox 15"/>
+          <p:cNvSpPr txBox="1"/>
+          <p:nvPr/>
+        </p:nvSpPr>
+        <p:spPr>
+          <a:xfrm>
+            <a:off x="777240" y="3410712"/>
+            <a:ext cx="4937760" cy="740664"/>
+          </a:xfrm>
+          <a:prstGeom prst="rect">
+            <a:avLst/>
+          </a:prstGeom>
+          <a:noFill/>
+        </p:spPr>
+        <p:txBody>
+          <a:bodyPr wrap="square" lIns="0" rIns="0" tIns="0" bIns="0" anchor="t">
+            <a:spAutoFit/>
+          </a:bodyPr>
+          <a:lstStyle/>
+          <a:p>
             <a:pPr algn="l">
               <a:lnSpc>
-                <a:spcPct val="100000"/>
-              </a:lnSpc>
-              <a:spcBef>
-                <a:spcPts val="0"/>
-              </a:spcBef>
-              <a:spcAft>
-                <a:spcPts val="400"/>
-              </a:spcAft>
-            </a:pPr>
-            <a:r>
-              <a:rPr sz="1450" b="0">
-                <a:solidFill>
-                  <a:srgbClr val="D5DEE5"/>
+                <a:spcPct val="108000"/>
+              </a:lnSpc>
+            </a:pPr>
+            <a:r>
+              <a:rPr sz="1050" b="0">
+                <a:solidFill>
+                  <a:srgbClr val="5A6B78"/>
                 </a:solidFill>
                 <a:latin typeface="Segoe UI"/>
               </a:rPr>
-              <a:t>Live SAP S/4HANA integration across 6 touchpoints</a:t>
-            </a:r>
-          </a:p>
-        </p:txBody>
-      </p:sp>
-      <p:sp>
-        <p:nvSpPr>
-          <p:cNvPr id="10" name="Oval 9"/>
+              <a:t>The Express API also serves the SPA — a single origin, so no CORS or cross-domain cookie config. Simpler and more secure.</a:t>
+            </a:r>
+          </a:p>
+        </p:txBody>
+      </p:sp>
+      <p:sp>
+        <p:nvSpPr>
+          <p:cNvPr id="17" name="Rounded Rectangle 16"/>
           <p:cNvSpPr/>
           <p:nvPr/>
         </p:nvSpPr>
         <p:spPr>
           <a:xfrm>
-            <a:off x="822960" y="3950208"/>
-            <a:ext cx="146304" cy="146304"/>
-          </a:xfrm>
-          <a:prstGeom prst="ellipse">
+            <a:off x="6254496" y="2514600"/>
+            <a:ext cx="5440680" cy="1700784"/>
+          </a:xfrm>
+          <a:prstGeom prst="roundRect">
+            <a:avLst>
+              <a:gd name="adj" fmla="val 5000"/>
+            </a:avLst>
+          </a:prstGeom>
+          <a:solidFill>
+            <a:srgbClr val="FFFFFF"/>
+          </a:solidFill>
+          <a:ln w="12700">
+            <a:solidFill>
+              <a:srgbClr val="D5DDE3"/>
+            </a:solidFill>
+          </a:ln>
+          <a:effectLst/>
+        </p:spPr>
+        <p:style>
+          <a:lnRef idx="1">
+            <a:schemeClr val="accent1"/>
+          </a:lnRef>
+          <a:fillRef idx="3">
+            <a:schemeClr val="accent1"/>
+          </a:fillRef>
+          <a:effectRef idx="2">
+            <a:schemeClr val="accent1"/>
+          </a:effectRef>
+          <a:fontRef idx="minor">
+            <a:schemeClr val="lt1"/>
+          </a:fontRef>
+        </p:style>
+        <p:txBody>
+          <a:bodyPr rtlCol="0" anchor="ctr"/>
+          <a:lstStyle/>
+          <a:p>
+            <a:pPr algn="ctr"/>
+          </a:p>
+        </p:txBody>
+      </p:sp>
+      <p:sp>
+        <p:nvSpPr>
+          <p:cNvPr id="18" name="Rectangle 17"/>
+          <p:cNvSpPr/>
+          <p:nvPr/>
+        </p:nvSpPr>
+        <p:spPr>
+          <a:xfrm>
+            <a:off x="6254496" y="2514600"/>
+            <a:ext cx="5440680" cy="91440"/>
+          </a:xfrm>
+          <a:prstGeom prst="rect">
             <a:avLst/>
           </a:prstGeom>
           <a:solidFill>
@@ -20140,14 +20435,14 @@
       </p:sp>
       <p:sp>
         <p:nvSpPr>
-          <p:cNvPr id="11" name="TextBox 10"/>
+          <p:cNvPr id="19" name="TextBox 18"/>
           <p:cNvSpPr txBox="1"/>
           <p:nvPr/>
         </p:nvSpPr>
         <p:spPr>
           <a:xfrm>
-            <a:off x="1143000" y="3886200"/>
-            <a:ext cx="9601200" cy="457200"/>
+            <a:off x="6528816" y="2752344"/>
+            <a:ext cx="4983480" cy="237744"/>
           </a:xfrm>
           <a:prstGeom prst="rect">
             <a:avLst/>
@@ -20155,46 +20450,158 @@
           <a:noFill/>
         </p:spPr>
         <p:txBody>
-          <a:bodyPr wrap="square" anchor="t" lIns="0" rIns="0" tIns="0" bIns="0">
+          <a:bodyPr wrap="square" lIns="0" rIns="0" tIns="0" bIns="0" anchor="t">
             <a:spAutoFit/>
           </a:bodyPr>
           <a:lstStyle/>
           <a:p>
+            <a:pPr algn="l"/>
+            <a:r>
+              <a:rPr sz="950" b="1">
+                <a:solidFill>
+                  <a:srgbClr val="E0912F"/>
+                </a:solidFill>
+                <a:latin typeface="Segoe UI"/>
+              </a:rPr>
+              <a:t>DATABASE</a:t>
+            </a:r>
+          </a:p>
+        </p:txBody>
+      </p:sp>
+      <p:sp>
+        <p:nvSpPr>
+          <p:cNvPr id="20" name="TextBox 19"/>
+          <p:cNvSpPr txBox="1"/>
+          <p:nvPr/>
+        </p:nvSpPr>
+        <p:spPr>
+          <a:xfrm>
+            <a:off x="6528816" y="3008376"/>
+            <a:ext cx="4983480" cy="365760"/>
+          </a:xfrm>
+          <a:prstGeom prst="rect">
+            <a:avLst/>
+          </a:prstGeom>
+          <a:noFill/>
+        </p:spPr>
+        <p:txBody>
+          <a:bodyPr wrap="square" lIns="0" rIns="0" tIns="0" bIns="0" anchor="t">
+            <a:spAutoFit/>
+          </a:bodyPr>
+          <a:lstStyle/>
+          <a:p>
+            <a:pPr algn="l"/>
+            <a:r>
+              <a:rPr sz="1500" b="1">
+                <a:solidFill>
+                  <a:srgbClr val="112A40"/>
+                </a:solidFill>
+                <a:latin typeface="Segoe UI Semibold"/>
+              </a:rPr>
+              <a:t>Managed Postgres, TLS on</a:t>
+            </a:r>
+          </a:p>
+        </p:txBody>
+      </p:sp>
+      <p:sp>
+        <p:nvSpPr>
+          <p:cNvPr id="21" name="TextBox 20"/>
+          <p:cNvSpPr txBox="1"/>
+          <p:nvPr/>
+        </p:nvSpPr>
+        <p:spPr>
+          <a:xfrm>
+            <a:off x="6528816" y="3410712"/>
+            <a:ext cx="4937760" cy="740664"/>
+          </a:xfrm>
+          <a:prstGeom prst="rect">
+            <a:avLst/>
+          </a:prstGeom>
+          <a:noFill/>
+        </p:spPr>
+        <p:txBody>
+          <a:bodyPr wrap="square" lIns="0" rIns="0" tIns="0" bIns="0" anchor="t">
+            <a:spAutoFit/>
+          </a:bodyPr>
+          <a:lstStyle/>
+          <a:p>
             <a:pPr algn="l">
               <a:lnSpc>
-                <a:spcPct val="100000"/>
-              </a:lnSpc>
-              <a:spcBef>
-                <a:spcPts val="0"/>
-              </a:spcBef>
-              <a:spcAft>
-                <a:spcPts val="400"/>
-              </a:spcAft>
-            </a:pPr>
-            <a:r>
-              <a:rPr sz="1450" b="0">
-                <a:solidFill>
-                  <a:srgbClr val="D5DEE5"/>
+                <a:spcPct val="108000"/>
+              </a:lnSpc>
+            </a:pPr>
+            <a:r>
+              <a:rPr sz="1050" b="0">
+                <a:solidFill>
+                  <a:srgbClr val="5A6B78"/>
                 </a:solidFill>
                 <a:latin typeface="Segoe UI"/>
               </a:rPr>
-              <a:t>Role-based access with an immutable, verified audit trail</a:t>
-            </a:r>
-          </a:p>
-        </p:txBody>
-      </p:sp>
-      <p:sp>
-        <p:nvSpPr>
-          <p:cNvPr id="12" name="Oval 11"/>
+              <a:t>A single DATABASE_URL with automatic TLS runs on Render, Neon, Railway, Supabase or RDS — zero code change from local dev.</a:t>
+            </a:r>
+          </a:p>
+        </p:txBody>
+      </p:sp>
+      <p:sp>
+        <p:nvSpPr>
+          <p:cNvPr id="22" name="Rounded Rectangle 21"/>
           <p:cNvSpPr/>
           <p:nvPr/>
         </p:nvSpPr>
         <p:spPr>
           <a:xfrm>
-            <a:off x="822960" y="4453128"/>
-            <a:ext cx="146304" cy="146304"/>
-          </a:xfrm>
-          <a:prstGeom prst="ellipse">
+            <a:off x="502920" y="4343400"/>
+            <a:ext cx="5440680" cy="1700784"/>
+          </a:xfrm>
+          <a:prstGeom prst="roundRect">
+            <a:avLst>
+              <a:gd name="adj" fmla="val 5000"/>
+            </a:avLst>
+          </a:prstGeom>
+          <a:solidFill>
+            <a:srgbClr val="FFFFFF"/>
+          </a:solidFill>
+          <a:ln w="12700">
+            <a:solidFill>
+              <a:srgbClr val="D5DDE3"/>
+            </a:solidFill>
+          </a:ln>
+          <a:effectLst/>
+        </p:spPr>
+        <p:style>
+          <a:lnRef idx="1">
+            <a:schemeClr val="accent1"/>
+          </a:lnRef>
+          <a:fillRef idx="3">
+            <a:schemeClr val="accent1"/>
+          </a:fillRef>
+          <a:effectRef idx="2">
+            <a:schemeClr val="accent1"/>
+          </a:effectRef>
+          <a:fontRef idx="minor">
+            <a:schemeClr val="lt1"/>
+          </a:fontRef>
+        </p:style>
+        <p:txBody>
+          <a:bodyPr rtlCol="0" anchor="ctr"/>
+          <a:lstStyle/>
+          <a:p>
+            <a:pPr algn="ctr"/>
+          </a:p>
+        </p:txBody>
+      </p:sp>
+      <p:sp>
+        <p:nvSpPr>
+          <p:cNvPr id="23" name="Rectangle 22"/>
+          <p:cNvSpPr/>
+          <p:nvPr/>
+        </p:nvSpPr>
+        <p:spPr>
+          <a:xfrm>
+            <a:off x="502920" y="4343400"/>
+            <a:ext cx="5440680" cy="91440"/>
+          </a:xfrm>
+          <a:prstGeom prst="rect">
             <a:avLst/>
           </a:prstGeom>
           <a:solidFill>
@@ -20229,14 +20636,14 @@
       </p:sp>
       <p:sp>
         <p:nvSpPr>
-          <p:cNvPr id="13" name="TextBox 12"/>
+          <p:cNvPr id="24" name="TextBox 23"/>
           <p:cNvSpPr txBox="1"/>
           <p:nvPr/>
         </p:nvSpPr>
         <p:spPr>
           <a:xfrm>
-            <a:off x="1143000" y="4389120"/>
-            <a:ext cx="9601200" cy="457200"/>
+            <a:off x="777240" y="4581144"/>
+            <a:ext cx="4983480" cy="237744"/>
           </a:xfrm>
           <a:prstGeom prst="rect">
             <a:avLst/>
@@ -20244,50 +20651,162 @@
           <a:noFill/>
         </p:spPr>
         <p:txBody>
-          <a:bodyPr wrap="square" anchor="t" lIns="0" rIns="0" tIns="0" bIns="0">
+          <a:bodyPr wrap="square" lIns="0" rIns="0" tIns="0" bIns="0" anchor="t">
             <a:spAutoFit/>
           </a:bodyPr>
           <a:lstStyle/>
           <a:p>
+            <a:pPr algn="l"/>
+            <a:r>
+              <a:rPr sz="950" b="1">
+                <a:solidFill>
+                  <a:srgbClr val="E0912F"/>
+                </a:solidFill>
+                <a:latin typeface="Segoe UI"/>
+              </a:rPr>
+              <a:t>HARDENED</a:t>
+            </a:r>
+          </a:p>
+        </p:txBody>
+      </p:sp>
+      <p:sp>
+        <p:nvSpPr>
+          <p:cNvPr id="25" name="TextBox 24"/>
+          <p:cNvSpPr txBox="1"/>
+          <p:nvPr/>
+        </p:nvSpPr>
+        <p:spPr>
+          <a:xfrm>
+            <a:off x="777240" y="4837176"/>
+            <a:ext cx="4983480" cy="365760"/>
+          </a:xfrm>
+          <a:prstGeom prst="rect">
+            <a:avLst/>
+          </a:prstGeom>
+          <a:noFill/>
+        </p:spPr>
+        <p:txBody>
+          <a:bodyPr wrap="square" lIns="0" rIns="0" tIns="0" bIns="0" anchor="t">
+            <a:spAutoFit/>
+          </a:bodyPr>
+          <a:lstStyle/>
+          <a:p>
+            <a:pPr algn="l"/>
+            <a:r>
+              <a:rPr sz="1500" b="1">
+                <a:solidFill>
+                  <a:srgbClr val="112A40"/>
+                </a:solidFill>
+                <a:latin typeface="Segoe UI Semibold"/>
+              </a:rPr>
+              <a:t>Production-ready by default</a:t>
+            </a:r>
+          </a:p>
+        </p:txBody>
+      </p:sp>
+      <p:sp>
+        <p:nvSpPr>
+          <p:cNvPr id="26" name="TextBox 25"/>
+          <p:cNvSpPr txBox="1"/>
+          <p:nvPr/>
+        </p:nvSpPr>
+        <p:spPr>
+          <a:xfrm>
+            <a:off x="777240" y="5239512"/>
+            <a:ext cx="4937760" cy="740664"/>
+          </a:xfrm>
+          <a:prstGeom prst="rect">
+            <a:avLst/>
+          </a:prstGeom>
+          <a:noFill/>
+        </p:spPr>
+        <p:txBody>
+          <a:bodyPr wrap="square" lIns="0" rIns="0" tIns="0" bIns="0" anchor="t">
+            <a:spAutoFit/>
+          </a:bodyPr>
+          <a:lstStyle/>
+          <a:p>
             <a:pPr algn="l">
               <a:lnSpc>
-                <a:spcPct val="100000"/>
-              </a:lnSpc>
-              <a:spcBef>
-                <a:spcPts val="0"/>
-              </a:spcBef>
-              <a:spcAft>
-                <a:spcPts val="400"/>
-              </a:spcAft>
-            </a:pPr>
-            <a:r>
-              <a:rPr sz="1450" b="0">
-                <a:solidFill>
-                  <a:srgbClr val="D5DEE5"/>
+                <a:spcPct val="108000"/>
+              </a:lnSpc>
+            </a:pPr>
+            <a:r>
+              <a:rPr sz="1050" b="0">
+                <a:solidFill>
+                  <a:srgbClr val="5A6B78"/>
                 </a:solidFill>
                 <a:latin typeface="Segoe UI"/>
               </a:rPr>
-              <a:t>Verified end-to-end — 32 tests plus a live run to closure</a:t>
-            </a:r>
-          </a:p>
-        </p:txBody>
-      </p:sp>
-      <p:sp>
-        <p:nvSpPr>
-          <p:cNvPr id="14" name="Rectangle 13"/>
+              <a:t>Secure cookies, HSTS, HTTPS-only, a boot check that refuses a weak JWT secret, and one-time rotation of every seeded password.</a:t>
+            </a:r>
+          </a:p>
+        </p:txBody>
+      </p:sp>
+      <p:sp>
+        <p:nvSpPr>
+          <p:cNvPr id="27" name="Rounded Rectangle 26"/>
           <p:cNvSpPr/>
           <p:nvPr/>
         </p:nvSpPr>
         <p:spPr>
           <a:xfrm>
-            <a:off x="822960" y="5257800"/>
-            <a:ext cx="3840480" cy="18288"/>
-          </a:xfrm>
-          <a:prstGeom prst="rect">
-            <a:avLst/>
+            <a:off x="6254496" y="4343400"/>
+            <a:ext cx="5440680" cy="1700784"/>
+          </a:xfrm>
+          <a:prstGeom prst="roundRect">
+            <a:avLst>
+              <a:gd name="adj" fmla="val 5000"/>
+            </a:avLst>
           </a:prstGeom>
           <a:solidFill>
-            <a:srgbClr val="3A5369"/>
+            <a:srgbClr val="FFFFFF"/>
+          </a:solidFill>
+          <a:ln w="12700">
+            <a:solidFill>
+              <a:srgbClr val="D5DDE3"/>
+            </a:solidFill>
+          </a:ln>
+          <a:effectLst/>
+        </p:spPr>
+        <p:style>
+          <a:lnRef idx="1">
+            <a:schemeClr val="accent1"/>
+          </a:lnRef>
+          <a:fillRef idx="3">
+            <a:schemeClr val="accent1"/>
+          </a:fillRef>
+          <a:effectRef idx="2">
+            <a:schemeClr val="accent1"/>
+          </a:effectRef>
+          <a:fontRef idx="minor">
+            <a:schemeClr val="lt1"/>
+          </a:fontRef>
+        </p:style>
+        <p:txBody>
+          <a:bodyPr rtlCol="0" anchor="ctr"/>
+          <a:lstStyle/>
+          <a:p>
+            <a:pPr algn="ctr"/>
+          </a:p>
+        </p:txBody>
+      </p:sp>
+      <p:sp>
+        <p:nvSpPr>
+          <p:cNvPr id="28" name="Rectangle 27"/>
+          <p:cNvSpPr/>
+          <p:nvPr/>
+        </p:nvSpPr>
+        <p:spPr>
+          <a:xfrm>
+            <a:off x="6254496" y="4343400"/>
+            <a:ext cx="5440680" cy="91440"/>
+          </a:xfrm>
+          <a:prstGeom prst="rect">
+            <a:avLst/>
+          </a:prstGeom>
+          <a:solidFill>
+            <a:srgbClr val="E0912F"/>
           </a:solidFill>
           <a:ln>
             <a:noFill/>
@@ -20318,14 +20837,14 @@
       </p:sp>
       <p:sp>
         <p:nvSpPr>
-          <p:cNvPr id="15" name="TextBox 14"/>
+          <p:cNvPr id="29" name="TextBox 28"/>
           <p:cNvSpPr txBox="1"/>
           <p:nvPr/>
         </p:nvSpPr>
         <p:spPr>
           <a:xfrm>
-            <a:off x="822960" y="5486400"/>
-            <a:ext cx="10058400" cy="914400"/>
+            <a:off x="6528816" y="4581144"/>
+            <a:ext cx="4983480" cy="237744"/>
           </a:xfrm>
           <a:prstGeom prst="rect">
             <a:avLst/>
@@ -20333,154 +20852,34 @@
           <a:noFill/>
         </p:spPr>
         <p:txBody>
-          <a:bodyPr wrap="square" anchor="t" lIns="0" rIns="0" tIns="0" bIns="0">
+          <a:bodyPr wrap="square" lIns="0" rIns="0" tIns="0" bIns="0" anchor="t">
             <a:spAutoFit/>
           </a:bodyPr>
           <a:lstStyle/>
           <a:p>
-            <a:pPr algn="l">
-              <a:lnSpc>
-                <a:spcPct val="100000"/>
-              </a:lnSpc>
-              <a:spcBef>
-                <a:spcPts val="0"/>
-              </a:spcBef>
-              <a:spcAft>
-                <a:spcPts val="400"/>
-              </a:spcAft>
-            </a:pPr>
-            <a:r>
-              <a:rPr sz="2200" b="1">
-                <a:solidFill>
-                  <a:srgbClr val="FFFFFF"/>
-                </a:solidFill>
-                <a:latin typeface="Segoe UI Semibold"/>
-              </a:rPr>
-              <a:t>Thank you</a:t>
-            </a:r>
-          </a:p>
-          <a:p>
-            <a:pPr algn="l">
-              <a:lnSpc>
-                <a:spcPct val="100000"/>
-              </a:lnSpc>
-              <a:spcBef>
-                <a:spcPts val="0"/>
-              </a:spcBef>
-              <a:spcAft>
-                <a:spcPts val="400"/>
-              </a:spcAft>
-            </a:pPr>
-            <a:r>
-              <a:rPr sz="1250" b="0">
-                <a:solidFill>
-                  <a:srgbClr val="B9C7D2"/>
+            <a:pPr algn="l"/>
+            <a:r>
+              <a:rPr sz="950" b="1">
+                <a:solidFill>
+                  <a:srgbClr val="E0912F"/>
                 </a:solidFill>
                 <a:latin typeface="Segoe UI"/>
               </a:rPr>
-              <a:t>Keshav Raj Jain   ·   Orient Paper &amp; Mill — CCMS</a:t>
-            </a:r>
-          </a:p>
-        </p:txBody>
-      </p:sp>
-      <p:sp>
-        <p:nvSpPr>
-          <p:cNvPr id="16" name="Rectangle 15"/>
-          <p:cNvSpPr/>
-          <p:nvPr/>
-        </p:nvSpPr>
-        <p:spPr>
-          <a:xfrm>
-            <a:off x="9509760" y="0"/>
-            <a:ext cx="2681935" cy="6858000"/>
-          </a:xfrm>
-          <a:prstGeom prst="rect">
-            <a:avLst/>
-          </a:prstGeom>
-          <a:solidFill>
-            <a:srgbClr val="1B3A55"/>
-          </a:solidFill>
-          <a:ln>
-            <a:noFill/>
-          </a:ln>
-          <a:effectLst/>
-        </p:spPr>
-        <p:style>
-          <a:lnRef idx="1">
-            <a:schemeClr val="accent1"/>
-          </a:lnRef>
-          <a:fillRef idx="3">
-            <a:schemeClr val="accent1"/>
-          </a:fillRef>
-          <a:effectRef idx="2">
-            <a:schemeClr val="accent1"/>
-          </a:effectRef>
-          <a:fontRef idx="minor">
-            <a:schemeClr val="lt1"/>
-          </a:fontRef>
-        </p:style>
-        <p:txBody>
-          <a:bodyPr rtlCol="0" anchor="ctr"/>
-          <a:lstStyle/>
-          <a:p>
-            <a:pPr algn="ctr"/>
-          </a:p>
-        </p:txBody>
-      </p:sp>
-      <p:sp>
-        <p:nvSpPr>
-          <p:cNvPr id="17" name="Rectangle 16"/>
-          <p:cNvSpPr/>
-          <p:nvPr/>
-        </p:nvSpPr>
-        <p:spPr>
-          <a:xfrm>
-            <a:off x="9509760" y="0"/>
-            <a:ext cx="54864" cy="6858000"/>
-          </a:xfrm>
-          <a:prstGeom prst="rect">
-            <a:avLst/>
-          </a:prstGeom>
-          <a:solidFill>
-            <a:srgbClr val="1F8A80"/>
-          </a:solidFill>
-          <a:ln>
-            <a:noFill/>
-          </a:ln>
-          <a:effectLst/>
-        </p:spPr>
-        <p:style>
-          <a:lnRef idx="1">
-            <a:schemeClr val="accent1"/>
-          </a:lnRef>
-          <a:fillRef idx="3">
-            <a:schemeClr val="accent1"/>
-          </a:fillRef>
-          <a:effectRef idx="2">
-            <a:schemeClr val="accent1"/>
-          </a:effectRef>
-          <a:fontRef idx="minor">
-            <a:schemeClr val="lt1"/>
-          </a:fontRef>
-        </p:style>
-        <p:txBody>
-          <a:bodyPr rtlCol="0" anchor="ctr"/>
-          <a:lstStyle/>
-          <a:p>
-            <a:pPr algn="ctr"/>
-          </a:p>
-        </p:txBody>
-      </p:sp>
-      <p:sp>
-        <p:nvSpPr>
-          <p:cNvPr id="18" name="TextBox 17"/>
+              <a:t>EMAIL</a:t>
+            </a:r>
+          </a:p>
+        </p:txBody>
+      </p:sp>
+      <p:sp>
+        <p:nvSpPr>
+          <p:cNvPr id="30" name="TextBox 29"/>
           <p:cNvSpPr txBox="1"/>
           <p:nvPr/>
         </p:nvSpPr>
         <p:spPr>
           <a:xfrm>
-            <a:off x="9829800" y="2286000"/>
-            <a:ext cx="2194560" cy="2286000"/>
+            <a:off x="6528816" y="4837176"/>
+            <a:ext cx="4983480" cy="365760"/>
           </a:xfrm>
           <a:prstGeom prst="rect">
             <a:avLst/>
@@ -20488,96 +20887,59 @@
           <a:noFill/>
         </p:spPr>
         <p:txBody>
-          <a:bodyPr wrap="square" anchor="ctr" lIns="0" rIns="0" tIns="0" bIns="0">
+          <a:bodyPr wrap="square" lIns="0" rIns="0" tIns="0" bIns="0" anchor="t">
             <a:spAutoFit/>
           </a:bodyPr>
           <a:lstStyle/>
           <a:p>
+            <a:pPr algn="l"/>
+            <a:r>
+              <a:rPr sz="1500" b="1">
+                <a:solidFill>
+                  <a:srgbClr val="112A40"/>
+                </a:solidFill>
+                <a:latin typeface="Segoe UI Semibold"/>
+              </a:rPr>
+              <a:t>Real inbox delivery</a:t>
+            </a:r>
+          </a:p>
+        </p:txBody>
+      </p:sp>
+      <p:sp>
+        <p:nvSpPr>
+          <p:cNvPr id="31" name="TextBox 30"/>
+          <p:cNvSpPr txBox="1"/>
+          <p:nvPr/>
+        </p:nvSpPr>
+        <p:spPr>
+          <a:xfrm>
+            <a:off x="6528816" y="5239512"/>
+            <a:ext cx="4937760" cy="740664"/>
+          </a:xfrm>
+          <a:prstGeom prst="rect">
+            <a:avLst/>
+          </a:prstGeom>
+          <a:noFill/>
+        </p:spPr>
+        <p:txBody>
+          <a:bodyPr wrap="square" lIns="0" rIns="0" tIns="0" bIns="0" anchor="t">
+            <a:spAutoFit/>
+          </a:bodyPr>
+          <a:lstStyle/>
+          <a:p>
             <a:pPr algn="l">
               <a:lnSpc>
-                <a:spcPct val="100000"/>
-              </a:lnSpc>
-              <a:spcBef>
-                <a:spcPts val="0"/>
-              </a:spcBef>
-              <a:spcAft>
-                <a:spcPts val="200"/>
-              </a:spcAft>
-            </a:pPr>
-            <a:r>
-              <a:rPr sz="3000" b="1">
-                <a:solidFill>
-                  <a:srgbClr val="FFFFFF"/>
-                </a:solidFill>
-                <a:latin typeface="Segoe UI Semibold"/>
-              </a:rPr>
-              <a:t>Q &amp; A</a:t>
-            </a:r>
-          </a:p>
-          <a:p>
-            <a:pPr algn="l">
-              <a:lnSpc>
-                <a:spcPct val="100000"/>
-              </a:lnSpc>
-              <a:spcBef>
-                <a:spcPts val="0"/>
-              </a:spcBef>
-              <a:spcAft>
-                <a:spcPts val="200"/>
-              </a:spcAft>
-            </a:pPr>
-            <a:r>
-              <a:rPr sz="1000" b="0">
-                <a:solidFill>
-                  <a:srgbClr val="FFFFFF"/>
+                <a:spcPct val="108000"/>
+              </a:lnSpc>
+            </a:pPr>
+            <a:r>
+              <a:rPr sz="1050" b="0">
+                <a:solidFill>
+                  <a:srgbClr val="5A6B78"/>
                 </a:solidFill>
                 <a:latin typeface="Segoe UI"/>
               </a:rPr>
-              <a:t> </a:t>
-            </a:r>
-          </a:p>
-          <a:p>
-            <a:pPr algn="l">
-              <a:lnSpc>
-                <a:spcPct val="100000"/>
-              </a:lnSpc>
-              <a:spcBef>
-                <a:spcPts val="0"/>
-              </a:spcBef>
-              <a:spcAft>
-                <a:spcPts val="200"/>
-              </a:spcAft>
-            </a:pPr>
-            <a:r>
-              <a:rPr sz="1300" b="1">
-                <a:solidFill>
-                  <a:srgbClr val="E0912F"/>
-                </a:solidFill>
-                <a:latin typeface="Segoe UI"/>
-              </a:rPr>
-              <a:t>Questions</a:t>
-            </a:r>
-          </a:p>
-          <a:p>
-            <a:pPr algn="l">
-              <a:lnSpc>
-                <a:spcPct val="100000"/>
-              </a:lnSpc>
-              <a:spcBef>
-                <a:spcPts val="0"/>
-              </a:spcBef>
-              <a:spcAft>
-                <a:spcPts val="200"/>
-              </a:spcAft>
-            </a:pPr>
-            <a:r>
-              <a:rPr sz="1300" b="1">
-                <a:solidFill>
-                  <a:srgbClr val="E0912F"/>
-                </a:solidFill>
-                <a:latin typeface="Segoe UI"/>
-              </a:rPr>
-              <a:t>welcome</a:t>
+              <a:t>Customer and staff notifications go out over SMTP (Gmail / Brevo / any relay) and are mirrored to the in-app Emails trail.</a:t>
             </a:r>
           </a:p>
         </p:txBody>
@@ -23150,7 +23512,7 @@
         <p:spPr>
           <a:xfrm>
             <a:off x="0" y="0"/>
-            <a:ext cx="12191695" cy="1170432"/>
+            <a:ext cx="12191695" cy="6858000"/>
           </a:xfrm>
           <a:prstGeom prst="rect">
             <a:avLst/>
@@ -23193,8 +23555,8 @@
         </p:nvSpPr>
         <p:spPr>
           <a:xfrm>
-            <a:off x="0" y="1170432"/>
-            <a:ext cx="12191695" cy="54864"/>
+            <a:off x="0" y="0"/>
+            <a:ext cx="256032" cy="6858000"/>
           </a:xfrm>
           <a:prstGeom prst="rect">
             <a:avLst/>
@@ -23237,8 +23599,8 @@
         </p:nvSpPr>
         <p:spPr>
           <a:xfrm>
-            <a:off x="502920" y="219456"/>
-            <a:ext cx="10058400" cy="274320"/>
+            <a:off x="822960" y="1005840"/>
+            <a:ext cx="10058400" cy="457200"/>
           </a:xfrm>
           <a:prstGeom prst="rect">
             <a:avLst/>
@@ -23246,20 +23608,30 @@
           <a:noFill/>
         </p:spPr>
         <p:txBody>
-          <a:bodyPr wrap="square" lIns="0" rIns="0" tIns="0" bIns="0" anchor="t">
+          <a:bodyPr wrap="square" anchor="t" lIns="0" rIns="0" tIns="0" bIns="0">
             <a:spAutoFit/>
           </a:bodyPr>
           <a:lstStyle/>
           <a:p>
-            <a:pPr algn="l"/>
-            <a:r>
-              <a:rPr sz="1100" b="1">
+            <a:pPr algn="l">
+              <a:lnSpc>
+                <a:spcPct val="100000"/>
+              </a:lnSpc>
+              <a:spcBef>
+                <a:spcPts val="0"/>
+              </a:spcBef>
+              <a:spcAft>
+                <a:spcPts val="400"/>
+              </a:spcAft>
+            </a:pPr>
+            <a:r>
+              <a:rPr sz="1300" b="1">
                 <a:solidFill>
                   <a:srgbClr val="E0912F"/>
                 </a:solidFill>
                 <a:latin typeface="Segoe UI"/>
               </a:rPr>
-              <a:t>09 · DEPLOYMENT</a:t>
+              <a:t>CONCLUSION</a:t>
             </a:r>
           </a:p>
         </p:txBody>
@@ -23272,8 +23644,8 @@
         </p:nvSpPr>
         <p:spPr>
           <a:xfrm>
-            <a:off x="502920" y="457200"/>
-            <a:ext cx="11155680" cy="640080"/>
+            <a:off x="777240" y="1371600"/>
+            <a:ext cx="10607040" cy="1371600"/>
           </a:xfrm>
           <a:prstGeom prst="rect">
             <a:avLst/>
@@ -23281,199 +23653,69 @@
           <a:noFill/>
         </p:spPr>
         <p:txBody>
-          <a:bodyPr wrap="square" lIns="0" rIns="0" tIns="0" bIns="0" anchor="t">
+          <a:bodyPr wrap="square" anchor="t" lIns="0" rIns="0" tIns="0" bIns="0">
             <a:spAutoFit/>
           </a:bodyPr>
           <a:lstStyle/>
           <a:p>
-            <a:pPr algn="l"/>
-            <a:r>
-              <a:rPr sz="2600" b="1">
+            <a:pPr algn="l">
+              <a:lnSpc>
+                <a:spcPct val="100000"/>
+              </a:lnSpc>
+              <a:spcBef>
+                <a:spcPts val="0"/>
+              </a:spcBef>
+              <a:spcAft>
+                <a:spcPts val="200"/>
+              </a:spcAft>
+            </a:pPr>
+            <a:r>
+              <a:rPr sz="3400" b="1">
                 <a:solidFill>
                   <a:srgbClr val="FFFFFF"/>
                 </a:solidFill>
                 <a:latin typeface="Segoe UI Semibold"/>
               </a:rPr>
-              <a:t>Deployed live on the internet</a:t>
-            </a:r>
-          </a:p>
-        </p:txBody>
-      </p:sp>
-      <p:sp>
-        <p:nvSpPr>
-          <p:cNvPr id="6" name="Rectangle 5"/>
+              <a:t>A complete, governed, SAP-ready</a:t>
+            </a:r>
+          </a:p>
+          <a:p>
+            <a:pPr algn="l">
+              <a:lnSpc>
+                <a:spcPct val="100000"/>
+              </a:lnSpc>
+              <a:spcBef>
+                <a:spcPts val="0"/>
+              </a:spcBef>
+              <a:spcAft>
+                <a:spcPts val="200"/>
+              </a:spcAft>
+            </a:pPr>
+            <a:r>
+              <a:rPr sz="3400" b="1">
+                <a:solidFill>
+                  <a:srgbClr val="FFFFFF"/>
+                </a:solidFill>
+                <a:latin typeface="Segoe UI Semibold"/>
+              </a:rPr>
+              <a:t>complaint management platform.</a:t>
+            </a:r>
+          </a:p>
+        </p:txBody>
+      </p:sp>
+      <p:sp>
+        <p:nvSpPr>
+          <p:cNvPr id="6" name="Oval 5"/>
           <p:cNvSpPr/>
           <p:nvPr/>
         </p:nvSpPr>
         <p:spPr>
           <a:xfrm>
-            <a:off x="0" y="6510528"/>
-            <a:ext cx="12191695" cy="347472"/>
-          </a:xfrm>
-          <a:prstGeom prst="rect">
-            <a:avLst/>
-          </a:prstGeom>
-          <a:solidFill>
-            <a:srgbClr val="112A40"/>
-          </a:solidFill>
-          <a:ln>
-            <a:noFill/>
-          </a:ln>
-          <a:effectLst/>
-        </p:spPr>
-        <p:style>
-          <a:lnRef idx="1">
-            <a:schemeClr val="accent1"/>
-          </a:lnRef>
-          <a:fillRef idx="3">
-            <a:schemeClr val="accent1"/>
-          </a:fillRef>
-          <a:effectRef idx="2">
-            <a:schemeClr val="accent1"/>
-          </a:effectRef>
-          <a:fontRef idx="minor">
-            <a:schemeClr val="lt1"/>
-          </a:fontRef>
-        </p:style>
-        <p:txBody>
-          <a:bodyPr rtlCol="0" anchor="ctr"/>
-          <a:lstStyle/>
-          <a:p>
-            <a:pPr algn="ctr"/>
-          </a:p>
-        </p:txBody>
-      </p:sp>
-      <p:sp>
-        <p:nvSpPr>
-          <p:cNvPr id="7" name="TextBox 6"/>
-          <p:cNvSpPr txBox="1"/>
-          <p:nvPr/>
-        </p:nvSpPr>
-        <p:spPr>
-          <a:xfrm>
-            <a:off x="502920" y="6528816"/>
-            <a:ext cx="7315200" cy="310896"/>
-          </a:xfrm>
-          <a:prstGeom prst="rect">
-            <a:avLst/>
-          </a:prstGeom>
-          <a:noFill/>
-        </p:spPr>
-        <p:txBody>
-          <a:bodyPr wrap="square" lIns="0" rIns="0" tIns="0" bIns="0" anchor="t">
-            <a:spAutoFit/>
-          </a:bodyPr>
-          <a:lstStyle/>
-          <a:p>
-            <a:pPr algn="l"/>
-            <a:r>
-              <a:rPr sz="900" b="0">
-                <a:solidFill>
-                  <a:srgbClr val="B9C7D2"/>
-                </a:solidFill>
-                <a:latin typeface="Segoe UI"/>
-              </a:rPr>
-              <a:t>Customer Complaint Management System  ·  Orient Paper &amp; Mill</a:t>
-            </a:r>
-          </a:p>
-        </p:txBody>
-      </p:sp>
-      <p:sp>
-        <p:nvSpPr>
-          <p:cNvPr id="8" name="TextBox 7"/>
-          <p:cNvSpPr txBox="1"/>
-          <p:nvPr/>
-        </p:nvSpPr>
-        <p:spPr>
-          <a:xfrm>
-            <a:off x="10424160" y="6528816"/>
-            <a:ext cx="1280160" cy="310896"/>
-          </a:xfrm>
-          <a:prstGeom prst="rect">
-            <a:avLst/>
-          </a:prstGeom>
-          <a:noFill/>
-        </p:spPr>
-        <p:txBody>
-          <a:bodyPr wrap="square" lIns="0" rIns="0" tIns="0" bIns="0" anchor="t">
-            <a:spAutoFit/>
-          </a:bodyPr>
-          <a:lstStyle/>
-          <a:p>
-            <a:pPr algn="r"/>
-            <a:r>
-              <a:rPr sz="900" b="1">
-                <a:solidFill>
-                  <a:srgbClr val="E0912F"/>
-                </a:solidFill>
-                <a:latin typeface="Segoe UI"/>
-              </a:rPr>
-              <a:t>18</a:t>
-            </a:r>
-          </a:p>
-        </p:txBody>
-      </p:sp>
-      <p:sp>
-        <p:nvSpPr>
-          <p:cNvPr id="9" name="Rounded Rectangle 8"/>
-          <p:cNvSpPr/>
-          <p:nvPr/>
-        </p:nvSpPr>
-        <p:spPr>
-          <a:xfrm>
-            <a:off x="502920" y="1463040"/>
-            <a:ext cx="11183112" cy="841248"/>
-          </a:xfrm>
-          <a:prstGeom prst="roundRect">
-            <a:avLst>
-              <a:gd name="adj" fmla="val 10000"/>
-            </a:avLst>
-          </a:prstGeom>
-          <a:solidFill>
-            <a:srgbClr val="EEF2F5"/>
-          </a:solidFill>
-          <a:ln>
-            <a:noFill/>
-          </a:ln>
-          <a:effectLst/>
-        </p:spPr>
-        <p:style>
-          <a:lnRef idx="1">
-            <a:schemeClr val="accent1"/>
-          </a:lnRef>
-          <a:fillRef idx="3">
-            <a:schemeClr val="accent1"/>
-          </a:fillRef>
-          <a:effectRef idx="2">
-            <a:schemeClr val="accent1"/>
-          </a:effectRef>
-          <a:fontRef idx="minor">
-            <a:schemeClr val="lt1"/>
-          </a:fontRef>
-        </p:style>
-        <p:txBody>
-          <a:bodyPr rtlCol="0" anchor="ctr"/>
-          <a:lstStyle/>
-          <a:p>
-            <a:pPr algn="ctr"/>
-          </a:p>
-        </p:txBody>
-      </p:sp>
-      <p:sp>
-        <p:nvSpPr>
-          <p:cNvPr id="10" name="Rounded Rectangle 9"/>
-          <p:cNvSpPr/>
-          <p:nvPr/>
-        </p:nvSpPr>
-        <p:spPr>
-          <a:xfrm>
-            <a:off x="713232" y="1609344"/>
-            <a:ext cx="118872" cy="548640"/>
-          </a:xfrm>
-          <a:prstGeom prst="roundRect">
-            <a:avLst>
-              <a:gd name="adj" fmla="val 50000"/>
-            </a:avLst>
+            <a:off x="822960" y="2944368"/>
+            <a:ext cx="146304" cy="146304"/>
+          </a:xfrm>
+          <a:prstGeom prst="ellipse">
+            <a:avLst/>
           </a:prstGeom>
           <a:solidFill>
             <a:srgbClr val="E0912F"/>
@@ -23507,14 +23749,14 @@
       </p:sp>
       <p:sp>
         <p:nvSpPr>
-          <p:cNvPr id="11" name="TextBox 10"/>
+          <p:cNvPr id="7" name="TextBox 6"/>
           <p:cNvSpPr txBox="1"/>
           <p:nvPr/>
         </p:nvSpPr>
         <p:spPr>
           <a:xfrm>
-            <a:off x="969264" y="1463040"/>
-            <a:ext cx="10424160" cy="841248"/>
+            <a:off x="1143000" y="2880360"/>
+            <a:ext cx="9601200" cy="457200"/>
           </a:xfrm>
           <a:prstGeom prst="rect">
             <a:avLst/>
@@ -23522,109 +23764,46 @@
           <a:noFill/>
         </p:spPr>
         <p:txBody>
-          <a:bodyPr wrap="square" lIns="0" rIns="0" tIns="0" bIns="0" anchor="ctr">
+          <a:bodyPr wrap="square" anchor="t" lIns="0" rIns="0" tIns="0" bIns="0">
             <a:spAutoFit/>
           </a:bodyPr>
           <a:lstStyle/>
           <a:p>
-            <a:pPr algn="l"/>
-            <a:r>
-              <a:rPr sz="1300" b="0">
-                <a:solidFill>
-                  <a:srgbClr val="1A2530"/>
+            <a:pPr algn="l">
+              <a:lnSpc>
+                <a:spcPct val="100000"/>
+              </a:lnSpc>
+              <a:spcBef>
+                <a:spcPts val="0"/>
+              </a:spcBef>
+              <a:spcAft>
+                <a:spcPts val="400"/>
+              </a:spcAft>
+            </a:pPr>
+            <a:r>
+              <a:rPr sz="1450" b="0">
+                <a:solidFill>
+                  <a:srgbClr val="D5DEE5"/>
                 </a:solidFill>
                 <a:latin typeface="Segoe UI"/>
               </a:rPr>
-              <a:t>Live at  </a:t>
-            </a:r>
-            <a:r>
-              <a:rPr sz="1400" b="1">
-                <a:solidFill>
-                  <a:srgbClr val="112A40"/>
-                </a:solidFill>
-                <a:latin typeface="Segoe UI Semibold"/>
-              </a:rPr>
-              <a:t>https://ccms-6dut.onrender.com</a:t>
-            </a:r>
-          </a:p>
-          <a:p>
-            <a:pPr algn="l">
-              <a:spcAft>
-                <a:spcPts val="0"/>
-              </a:spcAft>
-            </a:pPr>
-            <a:r>
-              <a:rPr sz="1100" b="0">
-                <a:solidFill>
-                  <a:srgbClr val="5A6B78"/>
-                </a:solidFill>
-                <a:latin typeface="Segoe UI"/>
-              </a:rPr>
-              <a:t>Deployed as a single web service on managed PostgreSQL, with production security enabled.</a:t>
-            </a:r>
-          </a:p>
-        </p:txBody>
-      </p:sp>
-      <p:sp>
-        <p:nvSpPr>
-          <p:cNvPr id="12" name="Rounded Rectangle 11"/>
+              <a:t>Full 8-stage lifecycle with automated approval gates</a:t>
+            </a:r>
+          </a:p>
+        </p:txBody>
+      </p:sp>
+      <p:sp>
+        <p:nvSpPr>
+          <p:cNvPr id="8" name="Oval 7"/>
           <p:cNvSpPr/>
           <p:nvPr/>
         </p:nvSpPr>
         <p:spPr>
           <a:xfrm>
-            <a:off x="502920" y="2514600"/>
-            <a:ext cx="5440680" cy="1700784"/>
-          </a:xfrm>
-          <a:prstGeom prst="roundRect">
-            <a:avLst>
-              <a:gd name="adj" fmla="val 5000"/>
-            </a:avLst>
-          </a:prstGeom>
-          <a:solidFill>
-            <a:srgbClr val="FFFFFF"/>
-          </a:solidFill>
-          <a:ln w="12700">
-            <a:solidFill>
-              <a:srgbClr val="D5DDE3"/>
-            </a:solidFill>
-          </a:ln>
-          <a:effectLst/>
-        </p:spPr>
-        <p:style>
-          <a:lnRef idx="1">
-            <a:schemeClr val="accent1"/>
-          </a:lnRef>
-          <a:fillRef idx="3">
-            <a:schemeClr val="accent1"/>
-          </a:fillRef>
-          <a:effectRef idx="2">
-            <a:schemeClr val="accent1"/>
-          </a:effectRef>
-          <a:fontRef idx="minor">
-            <a:schemeClr val="lt1"/>
-          </a:fontRef>
-        </p:style>
-        <p:txBody>
-          <a:bodyPr rtlCol="0" anchor="ctr"/>
-          <a:lstStyle/>
-          <a:p>
-            <a:pPr algn="ctr"/>
-          </a:p>
-        </p:txBody>
-      </p:sp>
-      <p:sp>
-        <p:nvSpPr>
-          <p:cNvPr id="13" name="Rectangle 12"/>
-          <p:cNvSpPr/>
-          <p:nvPr/>
-        </p:nvSpPr>
-        <p:spPr>
-          <a:xfrm>
-            <a:off x="502920" y="2514600"/>
-            <a:ext cx="5440680" cy="91440"/>
-          </a:xfrm>
-          <a:prstGeom prst="rect">
+            <a:off x="822960" y="3447288"/>
+            <a:ext cx="146304" cy="146304"/>
+          </a:xfrm>
+          <a:prstGeom prst="ellipse">
             <a:avLst/>
           </a:prstGeom>
           <a:solidFill>
@@ -23659,14 +23838,14 @@
       </p:sp>
       <p:sp>
         <p:nvSpPr>
-          <p:cNvPr id="14" name="TextBox 13"/>
+          <p:cNvPr id="9" name="TextBox 8"/>
           <p:cNvSpPr txBox="1"/>
           <p:nvPr/>
         </p:nvSpPr>
         <p:spPr>
           <a:xfrm>
-            <a:off x="777240" y="2752344"/>
-            <a:ext cx="4983480" cy="237744"/>
+            <a:off x="1143000" y="3383280"/>
+            <a:ext cx="9601200" cy="457200"/>
           </a:xfrm>
           <a:prstGeom prst="rect">
             <a:avLst/>
@@ -23674,158 +23853,46 @@
           <a:noFill/>
         </p:spPr>
         <p:txBody>
-          <a:bodyPr wrap="square" lIns="0" rIns="0" tIns="0" bIns="0" anchor="t">
+          <a:bodyPr wrap="square" anchor="t" lIns="0" rIns="0" tIns="0" bIns="0">
             <a:spAutoFit/>
           </a:bodyPr>
           <a:lstStyle/>
           <a:p>
-            <a:pPr algn="l"/>
-            <a:r>
-              <a:rPr sz="950" b="1">
-                <a:solidFill>
-                  <a:srgbClr val="E0912F"/>
+            <a:pPr algn="l">
+              <a:lnSpc>
+                <a:spcPct val="100000"/>
+              </a:lnSpc>
+              <a:spcBef>
+                <a:spcPts val="0"/>
+              </a:spcBef>
+              <a:spcAft>
+                <a:spcPts val="400"/>
+              </a:spcAft>
+            </a:pPr>
+            <a:r>
+              <a:rPr sz="1450" b="0">
+                <a:solidFill>
+                  <a:srgbClr val="D5DEE5"/>
                 </a:solidFill>
                 <a:latin typeface="Segoe UI"/>
               </a:rPr>
-              <a:t>ARCHITECTURE</a:t>
-            </a:r>
-          </a:p>
-        </p:txBody>
-      </p:sp>
-      <p:sp>
-        <p:nvSpPr>
-          <p:cNvPr id="15" name="TextBox 14"/>
-          <p:cNvSpPr txBox="1"/>
-          <p:nvPr/>
-        </p:nvSpPr>
-        <p:spPr>
-          <a:xfrm>
-            <a:off x="777240" y="3008376"/>
-            <a:ext cx="4983480" cy="365760"/>
-          </a:xfrm>
-          <a:prstGeom prst="rect">
-            <a:avLst/>
-          </a:prstGeom>
-          <a:noFill/>
-        </p:spPr>
-        <p:txBody>
-          <a:bodyPr wrap="square" lIns="0" rIns="0" tIns="0" bIns="0" anchor="t">
-            <a:spAutoFit/>
-          </a:bodyPr>
-          <a:lstStyle/>
-          <a:p>
-            <a:pPr algn="l"/>
-            <a:r>
-              <a:rPr sz="1500" b="1">
-                <a:solidFill>
-                  <a:srgbClr val="112A40"/>
-                </a:solidFill>
-                <a:latin typeface="Segoe UI Semibold"/>
-              </a:rPr>
-              <a:t>One service, one origin</a:t>
-            </a:r>
-          </a:p>
-        </p:txBody>
-      </p:sp>
-      <p:sp>
-        <p:nvSpPr>
-          <p:cNvPr id="16" name="TextBox 15"/>
-          <p:cNvSpPr txBox="1"/>
-          <p:nvPr/>
-        </p:nvSpPr>
-        <p:spPr>
-          <a:xfrm>
-            <a:off x="777240" y="3410712"/>
-            <a:ext cx="4937760" cy="740664"/>
-          </a:xfrm>
-          <a:prstGeom prst="rect">
-            <a:avLst/>
-          </a:prstGeom>
-          <a:noFill/>
-        </p:spPr>
-        <p:txBody>
-          <a:bodyPr wrap="square" lIns="0" rIns="0" tIns="0" bIns="0" anchor="t">
-            <a:spAutoFit/>
-          </a:bodyPr>
-          <a:lstStyle/>
-          <a:p>
-            <a:pPr algn="l">
-              <a:lnSpc>
-                <a:spcPct val="108000"/>
-              </a:lnSpc>
-            </a:pPr>
-            <a:r>
-              <a:rPr sz="1050" b="0">
-                <a:solidFill>
-                  <a:srgbClr val="5A6B78"/>
-                </a:solidFill>
-                <a:latin typeface="Segoe UI"/>
-              </a:rPr>
-              <a:t>The Express API also serves the SPA — a single origin, so no CORS or cross-domain cookie config. Simpler and more secure.</a:t>
-            </a:r>
-          </a:p>
-        </p:txBody>
-      </p:sp>
-      <p:sp>
-        <p:nvSpPr>
-          <p:cNvPr id="17" name="Rounded Rectangle 16"/>
+              <a:t>Live SAP S/4HANA integration across 6 touchpoints</a:t>
+            </a:r>
+          </a:p>
+        </p:txBody>
+      </p:sp>
+      <p:sp>
+        <p:nvSpPr>
+          <p:cNvPr id="10" name="Oval 9"/>
           <p:cNvSpPr/>
           <p:nvPr/>
         </p:nvSpPr>
         <p:spPr>
           <a:xfrm>
-            <a:off x="6254496" y="2514600"/>
-            <a:ext cx="5440680" cy="1700784"/>
-          </a:xfrm>
-          <a:prstGeom prst="roundRect">
-            <a:avLst>
-              <a:gd name="adj" fmla="val 5000"/>
-            </a:avLst>
-          </a:prstGeom>
-          <a:solidFill>
-            <a:srgbClr val="FFFFFF"/>
-          </a:solidFill>
-          <a:ln w="12700">
-            <a:solidFill>
-              <a:srgbClr val="D5DDE3"/>
-            </a:solidFill>
-          </a:ln>
-          <a:effectLst/>
-        </p:spPr>
-        <p:style>
-          <a:lnRef idx="1">
-            <a:schemeClr val="accent1"/>
-          </a:lnRef>
-          <a:fillRef idx="3">
-            <a:schemeClr val="accent1"/>
-          </a:fillRef>
-          <a:effectRef idx="2">
-            <a:schemeClr val="accent1"/>
-          </a:effectRef>
-          <a:fontRef idx="minor">
-            <a:schemeClr val="lt1"/>
-          </a:fontRef>
-        </p:style>
-        <p:txBody>
-          <a:bodyPr rtlCol="0" anchor="ctr"/>
-          <a:lstStyle/>
-          <a:p>
-            <a:pPr algn="ctr"/>
-          </a:p>
-        </p:txBody>
-      </p:sp>
-      <p:sp>
-        <p:nvSpPr>
-          <p:cNvPr id="18" name="Rectangle 17"/>
-          <p:cNvSpPr/>
-          <p:nvPr/>
-        </p:nvSpPr>
-        <p:spPr>
-          <a:xfrm>
-            <a:off x="6254496" y="2514600"/>
-            <a:ext cx="5440680" cy="91440"/>
-          </a:xfrm>
-          <a:prstGeom prst="rect">
+            <a:off x="822960" y="3950208"/>
+            <a:ext cx="146304" cy="146304"/>
+          </a:xfrm>
+          <a:prstGeom prst="ellipse">
             <a:avLst/>
           </a:prstGeom>
           <a:solidFill>
@@ -23860,14 +23927,14 @@
       </p:sp>
       <p:sp>
         <p:nvSpPr>
-          <p:cNvPr id="19" name="TextBox 18"/>
+          <p:cNvPr id="11" name="TextBox 10"/>
           <p:cNvSpPr txBox="1"/>
           <p:nvPr/>
         </p:nvSpPr>
         <p:spPr>
           <a:xfrm>
-            <a:off x="6528816" y="2752344"/>
-            <a:ext cx="4983480" cy="237744"/>
+            <a:off x="1143000" y="3886200"/>
+            <a:ext cx="9601200" cy="457200"/>
           </a:xfrm>
           <a:prstGeom prst="rect">
             <a:avLst/>
@@ -23875,158 +23942,46 @@
           <a:noFill/>
         </p:spPr>
         <p:txBody>
-          <a:bodyPr wrap="square" lIns="0" rIns="0" tIns="0" bIns="0" anchor="t">
+          <a:bodyPr wrap="square" anchor="t" lIns="0" rIns="0" tIns="0" bIns="0">
             <a:spAutoFit/>
           </a:bodyPr>
           <a:lstStyle/>
           <a:p>
-            <a:pPr algn="l"/>
-            <a:r>
-              <a:rPr sz="950" b="1">
-                <a:solidFill>
-                  <a:srgbClr val="E0912F"/>
+            <a:pPr algn="l">
+              <a:lnSpc>
+                <a:spcPct val="100000"/>
+              </a:lnSpc>
+              <a:spcBef>
+                <a:spcPts val="0"/>
+              </a:spcBef>
+              <a:spcAft>
+                <a:spcPts val="400"/>
+              </a:spcAft>
+            </a:pPr>
+            <a:r>
+              <a:rPr sz="1450" b="0">
+                <a:solidFill>
+                  <a:srgbClr val="D5DEE5"/>
                 </a:solidFill>
                 <a:latin typeface="Segoe UI"/>
               </a:rPr>
-              <a:t>DATABASE</a:t>
-            </a:r>
-          </a:p>
-        </p:txBody>
-      </p:sp>
-      <p:sp>
-        <p:nvSpPr>
-          <p:cNvPr id="20" name="TextBox 19"/>
-          <p:cNvSpPr txBox="1"/>
-          <p:nvPr/>
-        </p:nvSpPr>
-        <p:spPr>
-          <a:xfrm>
-            <a:off x="6528816" y="3008376"/>
-            <a:ext cx="4983480" cy="365760"/>
-          </a:xfrm>
-          <a:prstGeom prst="rect">
-            <a:avLst/>
-          </a:prstGeom>
-          <a:noFill/>
-        </p:spPr>
-        <p:txBody>
-          <a:bodyPr wrap="square" lIns="0" rIns="0" tIns="0" bIns="0" anchor="t">
-            <a:spAutoFit/>
-          </a:bodyPr>
-          <a:lstStyle/>
-          <a:p>
-            <a:pPr algn="l"/>
-            <a:r>
-              <a:rPr sz="1500" b="1">
-                <a:solidFill>
-                  <a:srgbClr val="112A40"/>
-                </a:solidFill>
-                <a:latin typeface="Segoe UI Semibold"/>
-              </a:rPr>
-              <a:t>Managed Postgres, TLS on</a:t>
-            </a:r>
-          </a:p>
-        </p:txBody>
-      </p:sp>
-      <p:sp>
-        <p:nvSpPr>
-          <p:cNvPr id="21" name="TextBox 20"/>
-          <p:cNvSpPr txBox="1"/>
-          <p:nvPr/>
-        </p:nvSpPr>
-        <p:spPr>
-          <a:xfrm>
-            <a:off x="6528816" y="3410712"/>
-            <a:ext cx="4937760" cy="740664"/>
-          </a:xfrm>
-          <a:prstGeom prst="rect">
-            <a:avLst/>
-          </a:prstGeom>
-          <a:noFill/>
-        </p:spPr>
-        <p:txBody>
-          <a:bodyPr wrap="square" lIns="0" rIns="0" tIns="0" bIns="0" anchor="t">
-            <a:spAutoFit/>
-          </a:bodyPr>
-          <a:lstStyle/>
-          <a:p>
-            <a:pPr algn="l">
-              <a:lnSpc>
-                <a:spcPct val="108000"/>
-              </a:lnSpc>
-            </a:pPr>
-            <a:r>
-              <a:rPr sz="1050" b="0">
-                <a:solidFill>
-                  <a:srgbClr val="5A6B78"/>
-                </a:solidFill>
-                <a:latin typeface="Segoe UI"/>
-              </a:rPr>
-              <a:t>A single DATABASE_URL with automatic TLS runs on Render, Neon, Railway, Supabase or RDS — zero code change from local dev.</a:t>
-            </a:r>
-          </a:p>
-        </p:txBody>
-      </p:sp>
-      <p:sp>
-        <p:nvSpPr>
-          <p:cNvPr id="22" name="Rounded Rectangle 21"/>
+              <a:t>Role-based access with an immutable, verified audit trail</a:t>
+            </a:r>
+          </a:p>
+        </p:txBody>
+      </p:sp>
+      <p:sp>
+        <p:nvSpPr>
+          <p:cNvPr id="12" name="Oval 11"/>
           <p:cNvSpPr/>
           <p:nvPr/>
         </p:nvSpPr>
         <p:spPr>
           <a:xfrm>
-            <a:off x="502920" y="4343400"/>
-            <a:ext cx="5440680" cy="1700784"/>
-          </a:xfrm>
-          <a:prstGeom prst="roundRect">
-            <a:avLst>
-              <a:gd name="adj" fmla="val 5000"/>
-            </a:avLst>
-          </a:prstGeom>
-          <a:solidFill>
-            <a:srgbClr val="FFFFFF"/>
-          </a:solidFill>
-          <a:ln w="12700">
-            <a:solidFill>
-              <a:srgbClr val="D5DDE3"/>
-            </a:solidFill>
-          </a:ln>
-          <a:effectLst/>
-        </p:spPr>
-        <p:style>
-          <a:lnRef idx="1">
-            <a:schemeClr val="accent1"/>
-          </a:lnRef>
-          <a:fillRef idx="3">
-            <a:schemeClr val="accent1"/>
-          </a:fillRef>
-          <a:effectRef idx="2">
-            <a:schemeClr val="accent1"/>
-          </a:effectRef>
-          <a:fontRef idx="minor">
-            <a:schemeClr val="lt1"/>
-          </a:fontRef>
-        </p:style>
-        <p:txBody>
-          <a:bodyPr rtlCol="0" anchor="ctr"/>
-          <a:lstStyle/>
-          <a:p>
-            <a:pPr algn="ctr"/>
-          </a:p>
-        </p:txBody>
-      </p:sp>
-      <p:sp>
-        <p:nvSpPr>
-          <p:cNvPr id="23" name="Rectangle 22"/>
-          <p:cNvSpPr/>
-          <p:nvPr/>
-        </p:nvSpPr>
-        <p:spPr>
-          <a:xfrm>
-            <a:off x="502920" y="4343400"/>
-            <a:ext cx="5440680" cy="91440"/>
-          </a:xfrm>
-          <a:prstGeom prst="rect">
+            <a:off x="822960" y="4453128"/>
+            <a:ext cx="146304" cy="146304"/>
+          </a:xfrm>
+          <a:prstGeom prst="ellipse">
             <a:avLst/>
           </a:prstGeom>
           <a:solidFill>
@@ -24061,14 +24016,14 @@
       </p:sp>
       <p:sp>
         <p:nvSpPr>
-          <p:cNvPr id="24" name="TextBox 23"/>
+          <p:cNvPr id="13" name="TextBox 12"/>
           <p:cNvSpPr txBox="1"/>
           <p:nvPr/>
         </p:nvSpPr>
         <p:spPr>
           <a:xfrm>
-            <a:off x="777240" y="4581144"/>
-            <a:ext cx="4983480" cy="237744"/>
+            <a:off x="1143000" y="4389120"/>
+            <a:ext cx="9601200" cy="457200"/>
           </a:xfrm>
           <a:prstGeom prst="rect">
             <a:avLst/>
@@ -24076,121 +24031,53 @@
           <a:noFill/>
         </p:spPr>
         <p:txBody>
-          <a:bodyPr wrap="square" lIns="0" rIns="0" tIns="0" bIns="0" anchor="t">
+          <a:bodyPr wrap="square" anchor="t" lIns="0" rIns="0" tIns="0" bIns="0">
             <a:spAutoFit/>
           </a:bodyPr>
           <a:lstStyle/>
           <a:p>
-            <a:pPr algn="l"/>
-            <a:r>
-              <a:rPr sz="950" b="1">
-                <a:solidFill>
-                  <a:srgbClr val="E0912F"/>
+            <a:pPr algn="l">
+              <a:lnSpc>
+                <a:spcPct val="100000"/>
+              </a:lnSpc>
+              <a:spcBef>
+                <a:spcPts val="0"/>
+              </a:spcBef>
+              <a:spcAft>
+                <a:spcPts val="400"/>
+              </a:spcAft>
+            </a:pPr>
+            <a:r>
+              <a:rPr sz="1450" b="0">
+                <a:solidFill>
+                  <a:srgbClr val="D5DEE5"/>
                 </a:solidFill>
                 <a:latin typeface="Segoe UI"/>
               </a:rPr>
-              <a:t>HARDENED</a:t>
-            </a:r>
-          </a:p>
-        </p:txBody>
-      </p:sp>
-      <p:sp>
-        <p:nvSpPr>
-          <p:cNvPr id="25" name="TextBox 24"/>
-          <p:cNvSpPr txBox="1"/>
-          <p:nvPr/>
-        </p:nvSpPr>
-        <p:spPr>
-          <a:xfrm>
-            <a:off x="777240" y="4837176"/>
-            <a:ext cx="4983480" cy="365760"/>
-          </a:xfrm>
-          <a:prstGeom prst="rect">
-            <a:avLst/>
-          </a:prstGeom>
-          <a:noFill/>
-        </p:spPr>
-        <p:txBody>
-          <a:bodyPr wrap="square" lIns="0" rIns="0" tIns="0" bIns="0" anchor="t">
-            <a:spAutoFit/>
-          </a:bodyPr>
-          <a:lstStyle/>
-          <a:p>
-            <a:pPr algn="l"/>
-            <a:r>
-              <a:rPr sz="1500" b="1">
-                <a:solidFill>
-                  <a:srgbClr val="112A40"/>
-                </a:solidFill>
-                <a:latin typeface="Segoe UI Semibold"/>
-              </a:rPr>
-              <a:t>Production-ready by default</a:t>
-            </a:r>
-          </a:p>
-        </p:txBody>
-      </p:sp>
-      <p:sp>
-        <p:nvSpPr>
-          <p:cNvPr id="26" name="TextBox 25"/>
-          <p:cNvSpPr txBox="1"/>
-          <p:nvPr/>
-        </p:nvSpPr>
-        <p:spPr>
-          <a:xfrm>
-            <a:off x="777240" y="5239512"/>
-            <a:ext cx="4937760" cy="740664"/>
-          </a:xfrm>
-          <a:prstGeom prst="rect">
-            <a:avLst/>
-          </a:prstGeom>
-          <a:noFill/>
-        </p:spPr>
-        <p:txBody>
-          <a:bodyPr wrap="square" lIns="0" rIns="0" tIns="0" bIns="0" anchor="t">
-            <a:spAutoFit/>
-          </a:bodyPr>
-          <a:lstStyle/>
-          <a:p>
-            <a:pPr algn="l">
-              <a:lnSpc>
-                <a:spcPct val="108000"/>
-              </a:lnSpc>
-            </a:pPr>
-            <a:r>
-              <a:rPr sz="1050" b="0">
-                <a:solidFill>
-                  <a:srgbClr val="5A6B78"/>
-                </a:solidFill>
-                <a:latin typeface="Segoe UI"/>
-              </a:rPr>
-              <a:t>Secure cookies, HSTS, HTTPS-only, a boot check that refuses a weak JWT secret, and one-time rotation of every seeded password.</a:t>
-            </a:r>
-          </a:p>
-        </p:txBody>
-      </p:sp>
-      <p:sp>
-        <p:nvSpPr>
-          <p:cNvPr id="27" name="Rounded Rectangle 26"/>
+              <a:t>Verified end-to-end — 32 tests plus a live run to closure</a:t>
+            </a:r>
+          </a:p>
+        </p:txBody>
+      </p:sp>
+      <p:sp>
+        <p:nvSpPr>
+          <p:cNvPr id="14" name="Rectangle 13"/>
           <p:cNvSpPr/>
           <p:nvPr/>
         </p:nvSpPr>
         <p:spPr>
           <a:xfrm>
-            <a:off x="6254496" y="4343400"/>
-            <a:ext cx="5440680" cy="1700784"/>
-          </a:xfrm>
-          <a:prstGeom prst="roundRect">
-            <a:avLst>
-              <a:gd name="adj" fmla="val 5000"/>
-            </a:avLst>
+            <a:off x="822960" y="5257800"/>
+            <a:ext cx="3840480" cy="18288"/>
+          </a:xfrm>
+          <a:prstGeom prst="rect">
+            <a:avLst/>
           </a:prstGeom>
           <a:solidFill>
-            <a:srgbClr val="FFFFFF"/>
+            <a:srgbClr val="3A5369"/>
           </a:solidFill>
-          <a:ln w="12700">
-            <a:solidFill>
-              <a:srgbClr val="D5DDE3"/>
-            </a:solidFill>
+          <a:ln>
+            <a:noFill/>
           </a:ln>
           <a:effectLst/>
         </p:spPr>
@@ -24218,20 +24105,87 @@
       </p:sp>
       <p:sp>
         <p:nvSpPr>
-          <p:cNvPr id="28" name="Rectangle 27"/>
+          <p:cNvPr id="15" name="TextBox 14"/>
+          <p:cNvSpPr txBox="1"/>
+          <p:nvPr/>
+        </p:nvSpPr>
+        <p:spPr>
+          <a:xfrm>
+            <a:off x="822960" y="5486400"/>
+            <a:ext cx="10058400" cy="914400"/>
+          </a:xfrm>
+          <a:prstGeom prst="rect">
+            <a:avLst/>
+          </a:prstGeom>
+          <a:noFill/>
+        </p:spPr>
+        <p:txBody>
+          <a:bodyPr wrap="square" anchor="t" lIns="0" rIns="0" tIns="0" bIns="0">
+            <a:spAutoFit/>
+          </a:bodyPr>
+          <a:lstStyle/>
+          <a:p>
+            <a:pPr algn="l">
+              <a:lnSpc>
+                <a:spcPct val="100000"/>
+              </a:lnSpc>
+              <a:spcBef>
+                <a:spcPts val="0"/>
+              </a:spcBef>
+              <a:spcAft>
+                <a:spcPts val="400"/>
+              </a:spcAft>
+            </a:pPr>
+            <a:r>
+              <a:rPr sz="2200" b="1">
+                <a:solidFill>
+                  <a:srgbClr val="FFFFFF"/>
+                </a:solidFill>
+                <a:latin typeface="Segoe UI Semibold"/>
+              </a:rPr>
+              <a:t>Thank you</a:t>
+            </a:r>
+          </a:p>
+          <a:p>
+            <a:pPr algn="l">
+              <a:lnSpc>
+                <a:spcPct val="100000"/>
+              </a:lnSpc>
+              <a:spcBef>
+                <a:spcPts val="0"/>
+              </a:spcBef>
+              <a:spcAft>
+                <a:spcPts val="400"/>
+              </a:spcAft>
+            </a:pPr>
+            <a:r>
+              <a:rPr sz="1250" b="0">
+                <a:solidFill>
+                  <a:srgbClr val="B9C7D2"/>
+                </a:solidFill>
+                <a:latin typeface="Segoe UI"/>
+              </a:rPr>
+              <a:t>Keshav Raj Jain   ·   Orient Paper &amp; Mill — CCMS</a:t>
+            </a:r>
+          </a:p>
+        </p:txBody>
+      </p:sp>
+      <p:sp>
+        <p:nvSpPr>
+          <p:cNvPr id="16" name="Rectangle 15"/>
           <p:cNvSpPr/>
           <p:nvPr/>
         </p:nvSpPr>
         <p:spPr>
           <a:xfrm>
-            <a:off x="6254496" y="4343400"/>
-            <a:ext cx="5440680" cy="91440"/>
+            <a:off x="9509760" y="0"/>
+            <a:ext cx="2681935" cy="6858000"/>
           </a:xfrm>
           <a:prstGeom prst="rect">
             <a:avLst/>
           </a:prstGeom>
           <a:solidFill>
-            <a:srgbClr val="E0912F"/>
+            <a:srgbClr val="1B3A55"/>
           </a:solidFill>
           <a:ln>
             <a:noFill/>
@@ -24262,14 +24216,58 @@
       </p:sp>
       <p:sp>
         <p:nvSpPr>
-          <p:cNvPr id="29" name="TextBox 28"/>
+          <p:cNvPr id="17" name="Rectangle 16"/>
+          <p:cNvSpPr/>
+          <p:nvPr/>
+        </p:nvSpPr>
+        <p:spPr>
+          <a:xfrm>
+            <a:off x="9509760" y="0"/>
+            <a:ext cx="54864" cy="6858000"/>
+          </a:xfrm>
+          <a:prstGeom prst="rect">
+            <a:avLst/>
+          </a:prstGeom>
+          <a:solidFill>
+            <a:srgbClr val="1F8A80"/>
+          </a:solidFill>
+          <a:ln>
+            <a:noFill/>
+          </a:ln>
+          <a:effectLst/>
+        </p:spPr>
+        <p:style>
+          <a:lnRef idx="1">
+            <a:schemeClr val="accent1"/>
+          </a:lnRef>
+          <a:fillRef idx="3">
+            <a:schemeClr val="accent1"/>
+          </a:fillRef>
+          <a:effectRef idx="2">
+            <a:schemeClr val="accent1"/>
+          </a:effectRef>
+          <a:fontRef idx="minor">
+            <a:schemeClr val="lt1"/>
+          </a:fontRef>
+        </p:style>
+        <p:txBody>
+          <a:bodyPr rtlCol="0" anchor="ctr"/>
+          <a:lstStyle/>
+          <a:p>
+            <a:pPr algn="ctr"/>
+          </a:p>
+        </p:txBody>
+      </p:sp>
+      <p:sp>
+        <p:nvSpPr>
+          <p:cNvPr id="18" name="TextBox 17"/>
           <p:cNvSpPr txBox="1"/>
           <p:nvPr/>
         </p:nvSpPr>
         <p:spPr>
           <a:xfrm>
-            <a:off x="6528816" y="4581144"/>
-            <a:ext cx="4983480" cy="237744"/>
+            <a:off x="9829800" y="2286000"/>
+            <a:ext cx="2194560" cy="2286000"/>
           </a:xfrm>
           <a:prstGeom prst="rect">
             <a:avLst/>
@@ -24277,94 +24275,96 @@
           <a:noFill/>
         </p:spPr>
         <p:txBody>
-          <a:bodyPr wrap="square" lIns="0" rIns="0" tIns="0" bIns="0" anchor="t">
+          <a:bodyPr wrap="square" anchor="ctr" lIns="0" rIns="0" tIns="0" bIns="0">
             <a:spAutoFit/>
           </a:bodyPr>
           <a:lstStyle/>
           <a:p>
-            <a:pPr algn="l"/>
-            <a:r>
-              <a:rPr sz="950" b="1">
+            <a:pPr algn="l">
+              <a:lnSpc>
+                <a:spcPct val="100000"/>
+              </a:lnSpc>
+              <a:spcBef>
+                <a:spcPts val="0"/>
+              </a:spcBef>
+              <a:spcAft>
+                <a:spcPts val="200"/>
+              </a:spcAft>
+            </a:pPr>
+            <a:r>
+              <a:rPr sz="3000" b="1">
+                <a:solidFill>
+                  <a:srgbClr val="FFFFFF"/>
+                </a:solidFill>
+                <a:latin typeface="Segoe UI Semibold"/>
+              </a:rPr>
+              <a:t>Q &amp; A</a:t>
+            </a:r>
+          </a:p>
+          <a:p>
+            <a:pPr algn="l">
+              <a:lnSpc>
+                <a:spcPct val="100000"/>
+              </a:lnSpc>
+              <a:spcBef>
+                <a:spcPts val="0"/>
+              </a:spcBef>
+              <a:spcAft>
+                <a:spcPts val="200"/>
+              </a:spcAft>
+            </a:pPr>
+            <a:r>
+              <a:rPr sz="1000" b="0">
+                <a:solidFill>
+                  <a:srgbClr val="FFFFFF"/>
+                </a:solidFill>
+                <a:latin typeface="Segoe UI"/>
+              </a:rPr>
+              <a:t> </a:t>
+            </a:r>
+          </a:p>
+          <a:p>
+            <a:pPr algn="l">
+              <a:lnSpc>
+                <a:spcPct val="100000"/>
+              </a:lnSpc>
+              <a:spcBef>
+                <a:spcPts val="0"/>
+              </a:spcBef>
+              <a:spcAft>
+                <a:spcPts val="200"/>
+              </a:spcAft>
+            </a:pPr>
+            <a:r>
+              <a:rPr sz="1300" b="1">
                 <a:solidFill>
                   <a:srgbClr val="E0912F"/>
                 </a:solidFill>
                 <a:latin typeface="Segoe UI"/>
               </a:rPr>
-              <a:t>EMAIL</a:t>
-            </a:r>
-          </a:p>
-        </p:txBody>
-      </p:sp>
-      <p:sp>
-        <p:nvSpPr>
-          <p:cNvPr id="30" name="TextBox 29"/>
-          <p:cNvSpPr txBox="1"/>
-          <p:nvPr/>
-        </p:nvSpPr>
-        <p:spPr>
-          <a:xfrm>
-            <a:off x="6528816" y="4837176"/>
-            <a:ext cx="4983480" cy="365760"/>
-          </a:xfrm>
-          <a:prstGeom prst="rect">
-            <a:avLst/>
-          </a:prstGeom>
-          <a:noFill/>
-        </p:spPr>
-        <p:txBody>
-          <a:bodyPr wrap="square" lIns="0" rIns="0" tIns="0" bIns="0" anchor="t">
-            <a:spAutoFit/>
-          </a:bodyPr>
-          <a:lstStyle/>
-          <a:p>
-            <a:pPr algn="l"/>
-            <a:r>
-              <a:rPr sz="1500" b="1">
-                <a:solidFill>
-                  <a:srgbClr val="112A40"/>
-                </a:solidFill>
-                <a:latin typeface="Segoe UI Semibold"/>
-              </a:rPr>
-              <a:t>Real inbox delivery</a:t>
-            </a:r>
-          </a:p>
-        </p:txBody>
-      </p:sp>
-      <p:sp>
-        <p:nvSpPr>
-          <p:cNvPr id="31" name="TextBox 30"/>
-          <p:cNvSpPr txBox="1"/>
-          <p:nvPr/>
-        </p:nvSpPr>
-        <p:spPr>
-          <a:xfrm>
-            <a:off x="6528816" y="5239512"/>
-            <a:ext cx="4937760" cy="740664"/>
-          </a:xfrm>
-          <a:prstGeom prst="rect">
-            <a:avLst/>
-          </a:prstGeom>
-          <a:noFill/>
-        </p:spPr>
-        <p:txBody>
-          <a:bodyPr wrap="square" lIns="0" rIns="0" tIns="0" bIns="0" anchor="t">
-            <a:spAutoFit/>
-          </a:bodyPr>
-          <a:lstStyle/>
+              <a:t>Questions</a:t>
+            </a:r>
+          </a:p>
           <a:p>
             <a:pPr algn="l">
               <a:lnSpc>
-                <a:spcPct val="108000"/>
-              </a:lnSpc>
-            </a:pPr>
-            <a:r>
-              <a:rPr sz="1050" b="0">
-                <a:solidFill>
-                  <a:srgbClr val="5A6B78"/>
+                <a:spcPct val="100000"/>
+              </a:lnSpc>
+              <a:spcBef>
+                <a:spcPts val="0"/>
+              </a:spcBef>
+              <a:spcAft>
+                <a:spcPts val="200"/>
+              </a:spcAft>
+            </a:pPr>
+            <a:r>
+              <a:rPr sz="1300" b="1">
+                <a:solidFill>
+                  <a:srgbClr val="E0912F"/>
                 </a:solidFill>
                 <a:latin typeface="Segoe UI"/>
               </a:rPr>
-              <a:t>Customer and staff notifications go out over SMTP (Gmail / Brevo / any relay) and are mirrored to the in-app Emails trail.</a:t>
+              <a:t>welcome</a:t>
             </a:r>
           </a:p>
         </p:txBody>
@@ -28143,7 +28143,7 @@
         <p:spPr>
           <a:xfrm>
             <a:off x="502920" y="3840480"/>
-            <a:ext cx="11192256" cy="960120"/>
+            <a:ext cx="11192256" cy="1243584"/>
           </a:xfrm>
           <a:prstGeom prst="roundRect">
             <a:avLst/>
@@ -28959,7 +28959,7 @@
         </p:nvSpPr>
         <p:spPr>
           <a:xfrm>
-            <a:off x="502920" y="5029200"/>
+            <a:off x="502920" y="5212080"/>
             <a:ext cx="11155680" cy="1280160"/>
           </a:xfrm>
           <a:prstGeom prst="rect">
